--- a/PPTs/DELETED.pptx
+++ b/PPTs/DELETED.pptx
@@ -5,7 +5,7 @@
     <p:sldMasterId id="2147483670" r:id="rId1"/>
   </p:sldMasterIdLst>
   <p:notesMasterIdLst>
-    <p:notesMasterId r:id="rId12"/>
+    <p:notesMasterId r:id="rId13"/>
   </p:notesMasterIdLst>
   <p:sldIdLst>
     <p:sldId id="283" r:id="rId2"/>
@@ -18,37 +18,38 @@
     <p:sldId id="332" r:id="rId9"/>
     <p:sldId id="346" r:id="rId10"/>
     <p:sldId id="1012" r:id="rId11"/>
+    <p:sldId id="318" r:id="rId12"/>
   </p:sldIdLst>
   <p:sldSz cx="9144000" cy="5143500" type="screen16x9"/>
   <p:notesSz cx="6858000" cy="9144000"/>
   <p:embeddedFontLst>
     <p:embeddedFont>
       <p:font typeface="Quattrocento Sans" panose="020B0502050000020003" pitchFamily="34" charset="0"/>
-      <p:regular r:id="rId13"/>
-      <p:bold r:id="rId14"/>
-      <p:italic r:id="rId15"/>
-      <p:boldItalic r:id="rId16"/>
+      <p:regular r:id="rId14"/>
+      <p:bold r:id="rId15"/>
+      <p:italic r:id="rId16"/>
+      <p:boldItalic r:id="rId17"/>
     </p:embeddedFont>
     <p:embeddedFont>
       <p:font typeface="Roboto" panose="02000000000000000000" pitchFamily="2" charset="0"/>
-      <p:regular r:id="rId17"/>
-      <p:bold r:id="rId18"/>
-      <p:italic r:id="rId19"/>
-      <p:boldItalic r:id="rId20"/>
+      <p:regular r:id="rId18"/>
+      <p:bold r:id="rId19"/>
+      <p:italic r:id="rId20"/>
+      <p:boldItalic r:id="rId21"/>
     </p:embeddedFont>
     <p:embeddedFont>
       <p:font typeface="Roboto Light" panose="02000000000000000000" pitchFamily="2" charset="0"/>
-      <p:regular r:id="rId21"/>
-      <p:bold r:id="rId22"/>
-      <p:italic r:id="rId23"/>
-      <p:boldItalic r:id="rId24"/>
+      <p:regular r:id="rId22"/>
+      <p:bold r:id="rId23"/>
+      <p:italic r:id="rId24"/>
+      <p:boldItalic r:id="rId25"/>
     </p:embeddedFont>
     <p:embeddedFont>
       <p:font typeface="Roboto Medium" panose="02000000000000000000" pitchFamily="2" charset="0"/>
-      <p:regular r:id="rId25"/>
-      <p:bold r:id="rId26"/>
-      <p:italic r:id="rId27"/>
-      <p:boldItalic r:id="rId28"/>
+      <p:regular r:id="rId26"/>
+      <p:bold r:id="rId27"/>
+      <p:italic r:id="rId28"/>
+      <p:boldItalic r:id="rId29"/>
     </p:embeddedFont>
   </p:embeddedFontLst>
   <p:defaultTextStyle>
@@ -6121,6 +6122,343 @@
 </p:notes>
 </file>
 
+<file path=ppt/notesSlides/notesSlide8.xml><?xml version="1.0" encoding="utf-8"?>
+<p:notes xmlns:a="http://schemas.openxmlformats.org/drawingml/2006/main" xmlns:r="http://schemas.openxmlformats.org/officeDocument/2006/relationships" xmlns:p="http://schemas.openxmlformats.org/presentationml/2006/main" showMasterSp="0" showMasterPhAnim="0">
+  <p:cSld>
+    <p:spTree>
+      <p:nvGrpSpPr>
+        <p:cNvPr id="1" name="Shape 1312"/>
+        <p:cNvGrpSpPr/>
+        <p:nvPr/>
+      </p:nvGrpSpPr>
+      <p:grpSpPr>
+        <a:xfrm>
+          <a:off x="0" y="0"/>
+          <a:ext cx="0" cy="0"/>
+          <a:chOff x="0" y="0"/>
+          <a:chExt cx="0" cy="0"/>
+        </a:xfrm>
+      </p:grpSpPr>
+      <p:sp>
+        <p:nvSpPr>
+          <p:cNvPr id="1313" name="Google Shape;1313;g2ea4bf034c0_0_2056:notes"/>
+          <p:cNvSpPr>
+            <a:spLocks noGrp="1" noRot="1" noChangeAspect="1"/>
+          </p:cNvSpPr>
+          <p:nvPr>
+            <p:ph type="sldImg" idx="2"/>
+          </p:nvPr>
+        </p:nvSpPr>
+        <p:spPr>
+          <a:xfrm>
+            <a:off x="381000" y="685800"/>
+            <a:ext cx="6096000" cy="3429000"/>
+          </a:xfrm>
+          <a:custGeom>
+            <a:avLst/>
+            <a:gdLst/>
+            <a:ahLst/>
+            <a:cxnLst/>
+            <a:rect l="l" t="t" r="r" b="b"/>
+            <a:pathLst>
+              <a:path w="120000" h="120000" extrusionOk="0">
+                <a:moveTo>
+                  <a:pt x="0" y="0"/>
+                </a:moveTo>
+                <a:lnTo>
+                  <a:pt x="120000" y="0"/>
+                </a:lnTo>
+                <a:lnTo>
+                  <a:pt x="120000" y="120000"/>
+                </a:lnTo>
+                <a:lnTo>
+                  <a:pt x="0" y="120000"/>
+                </a:lnTo>
+                <a:close/>
+              </a:path>
+            </a:pathLst>
+          </a:custGeom>
+        </p:spPr>
+      </p:sp>
+      <p:sp>
+        <p:nvSpPr>
+          <p:cNvPr id="1314" name="Google Shape;1314;g2ea4bf034c0_0_2056:notes"/>
+          <p:cNvSpPr txBox="1">
+            <a:spLocks noGrp="1"/>
+          </p:cNvSpPr>
+          <p:nvPr>
+            <p:ph type="body" idx="1"/>
+          </p:nvPr>
+        </p:nvSpPr>
+        <p:spPr>
+          <a:xfrm>
+            <a:off x="685800" y="4343400"/>
+            <a:ext cx="5486400" cy="4114800"/>
+          </a:xfrm>
+          <a:prstGeom prst="rect">
+            <a:avLst/>
+          </a:prstGeom>
+        </p:spPr>
+        <p:txBody>
+          <a:bodyPr spcFirstLastPara="1" wrap="square" lIns="91425" tIns="91425" rIns="91425" bIns="91425" anchor="t" anchorCtr="0">
+            <a:noAutofit/>
+          </a:bodyPr>
+          <a:lstStyle/>
+          <a:p>
+            <a:pPr marL="114300" indent="0" fontAlgn="base">
+              <a:buNone/>
+            </a:pPr>
+            <a:r>
+              <a:rPr lang="nl-NL" altLang="zh-CN" dirty="0"/>
+              <a:t>Example:</a:t>
+            </a:r>
+          </a:p>
+          <a:p>
+            <a:pPr marL="114300" indent="0" fontAlgn="base">
+              <a:buNone/>
+            </a:pPr>
+            <a:r>
+              <a:rPr lang="nl-NL" altLang="zh-CN" dirty="0"/>
+              <a:t>Sender transmits</a:t>
+            </a:r>
+          </a:p>
+          <a:p>
+            <a:pPr lvl="1" fontAlgn="base"/>
+            <a:r>
+              <a:rPr lang="nl-NL" altLang="zh-CN" dirty="0"/>
+              <a:t>Seq 1000</a:t>
+            </a:r>
+          </a:p>
+          <a:p>
+            <a:pPr lvl="1" fontAlgn="base"/>
+            <a:r>
+              <a:rPr lang="nl-NL" altLang="zh-CN" dirty="0"/>
+              <a:t>Seq 2000</a:t>
+            </a:r>
+          </a:p>
+          <a:p>
+            <a:pPr lvl="1" fontAlgn="base"/>
+            <a:r>
+              <a:rPr lang="nl-NL" altLang="zh-CN" b="1" i="1" dirty="0"/>
+              <a:t>Seq 3000 Dropped in flight</a:t>
+            </a:r>
+          </a:p>
+          <a:p>
+            <a:pPr lvl="1" fontAlgn="base"/>
+            <a:r>
+              <a:rPr lang="nl-NL" altLang="zh-CN" dirty="0"/>
+              <a:t>Seq 4000</a:t>
+            </a:r>
+          </a:p>
+          <a:p>
+            <a:pPr lvl="1" fontAlgn="base"/>
+            <a:r>
+              <a:rPr lang="nl-NL" altLang="zh-CN" dirty="0"/>
+              <a:t>Seq 5000</a:t>
+            </a:r>
+          </a:p>
+          <a:p>
+            <a:pPr lvl="1" fontAlgn="base"/>
+            <a:r>
+              <a:rPr lang="nl-NL" altLang="zh-CN" dirty="0"/>
+              <a:t>Seq 6000</a:t>
+            </a:r>
+          </a:p>
+          <a:p>
+            <a:pPr marL="114300" indent="0" fontAlgn="base">
+              <a:buNone/>
+            </a:pPr>
+            <a:r>
+              <a:rPr lang="nl-NL" altLang="zh-CN" dirty="0"/>
+              <a:t>Receiver acks:</a:t>
+            </a:r>
+          </a:p>
+          <a:p>
+            <a:pPr lvl="1" fontAlgn="base"/>
+            <a:r>
+              <a:rPr lang="nl-NL" altLang="zh-CN" dirty="0"/>
+              <a:t>ACK 2000 (I have received up to Seq 1999, and am expecting Seq 2000)</a:t>
+            </a:r>
+          </a:p>
+          <a:p>
+            <a:pPr lvl="1" fontAlgn="base"/>
+            <a:r>
+              <a:rPr lang="nl-NL" altLang="zh-CN" dirty="0"/>
+              <a:t>ACK 3000 (I have received up to Seq 2999, and am expecting Seq 2000)</a:t>
+            </a:r>
+          </a:p>
+          <a:p>
+            <a:pPr lvl="1" fontAlgn="base"/>
+            <a:r>
+              <a:rPr lang="nl-NL" altLang="zh-CN" dirty="0"/>
+              <a:t>ACK 3000 (I have received up to Seq 2999, and am expecting Seq 2000)</a:t>
+            </a:r>
+          </a:p>
+          <a:p>
+            <a:pPr lvl="1" fontAlgn="base"/>
+            <a:r>
+              <a:rPr lang="nl-NL" altLang="zh-CN" dirty="0"/>
+              <a:t>ACK 3000 (I have received up to Seq 2999, and am expecting Seq 2000)</a:t>
+            </a:r>
+          </a:p>
+          <a:p>
+            <a:pPr lvl="1" fontAlgn="base"/>
+            <a:r>
+              <a:rPr lang="nl-NL" altLang="zh-CN" dirty="0"/>
+              <a:t>ACK 3000 (I have received up to Seq 2999, and am expecting Seq 2000)</a:t>
+            </a:r>
+          </a:p>
+          <a:p>
+            <a:pPr lvl="1" fontAlgn="base"/>
+            <a:r>
+              <a:rPr lang="nl-NL" altLang="zh-CN" dirty="0"/>
+              <a:t>ACK 3000 (I have received up to Seq 2999, and am expecting Seq 2000)</a:t>
+            </a:r>
+          </a:p>
+          <a:p>
+            <a:pPr marL="114300" indent="0" fontAlgn="base">
+              <a:buNone/>
+            </a:pPr>
+            <a:r>
+              <a:rPr lang="nl-NL" altLang="zh-CN" dirty="0"/>
+              <a:t>Duplicate ACKs indicate packet loss/reorder</a:t>
+            </a:r>
+          </a:p>
+          <a:p>
+            <a:pPr marL="114300" indent="0" fontAlgn="base">
+              <a:buNone/>
+            </a:pPr>
+            <a:endParaRPr lang="nl-NL" altLang="zh-CN" dirty="0"/>
+          </a:p>
+          <a:p>
+            <a:pPr marL="114300" indent="0" fontAlgn="base">
+              <a:buNone/>
+            </a:pPr>
+            <a:endParaRPr lang="nl-NL" altLang="zh-CN" dirty="0"/>
+          </a:p>
+          <a:p>
+            <a:pPr marL="114300" indent="0" fontAlgn="base">
+              <a:buNone/>
+            </a:pPr>
+            <a:endParaRPr lang="nl-NL" altLang="zh-CN" dirty="0"/>
+          </a:p>
+          <a:p>
+            <a:pPr marL="114300" indent="0" fontAlgn="base">
+              <a:buNone/>
+            </a:pPr>
+            <a:endParaRPr lang="nl-NL" altLang="zh-CN" dirty="0"/>
+          </a:p>
+          <a:p>
+            <a:pPr marL="457200" lvl="0" indent="-342900" algn="l" rtl="0">
+              <a:spcBef>
+                <a:spcPts val="600"/>
+              </a:spcBef>
+              <a:spcAft>
+                <a:spcPts val="0"/>
+              </a:spcAft>
+              <a:buSzPts val="1800"/>
+              <a:buChar char="●"/>
+            </a:pPr>
+            <a:r>
+              <a:rPr lang="en-US" altLang="zh-CN" dirty="0"/>
+              <a:t>If we receive acks for 1, 2, 3, 4, 6, 7, 8, 9, we probably lost 5.</a:t>
+            </a:r>
+          </a:p>
+          <a:p>
+            <a:pPr marL="457200" lvl="0" indent="-342900" algn="l" rtl="0">
+              <a:spcBef>
+                <a:spcPts val="0"/>
+              </a:spcBef>
+              <a:spcAft>
+                <a:spcPts val="0"/>
+              </a:spcAft>
+              <a:buSzPts val="1800"/>
+              <a:buChar char="●"/>
+            </a:pPr>
+            <a:r>
+              <a:rPr lang="en-US" altLang="zh-CN" dirty="0"/>
+              <a:t>Declare a packet lost if </a:t>
+            </a:r>
+            <a:r>
+              <a:rPr lang="en-US" altLang="zh-CN" i="1" dirty="0"/>
+              <a:t>k</a:t>
+            </a:r>
+            <a:r>
+              <a:rPr lang="en-US" altLang="zh-CN" dirty="0"/>
+              <a:t> subsequent packets are </a:t>
+            </a:r>
+            <a:r>
+              <a:rPr lang="en-US" altLang="zh-CN" dirty="0" err="1"/>
+              <a:t>acked</a:t>
+            </a:r>
+            <a:r>
+              <a:rPr lang="en-US" altLang="zh-CN" dirty="0"/>
+              <a:t>.</a:t>
+            </a:r>
+          </a:p>
+          <a:p>
+            <a:pPr marL="914400" lvl="1" indent="-342900" algn="l" rtl="0">
+              <a:spcBef>
+                <a:spcPts val="0"/>
+              </a:spcBef>
+              <a:spcAft>
+                <a:spcPts val="0"/>
+              </a:spcAft>
+              <a:buSzPts val="1800"/>
+              <a:buChar char="○"/>
+            </a:pPr>
+            <a:r>
+              <a:rPr lang="en-US" altLang="zh-CN" i="1" dirty="0"/>
+              <a:t>k</a:t>
+            </a:r>
+            <a:r>
+              <a:rPr lang="en-US" altLang="zh-CN" dirty="0"/>
+              <a:t> = 3 is common.</a:t>
+            </a:r>
+          </a:p>
+          <a:p>
+            <a:pPr marL="0" lvl="0" indent="0" algn="l" rtl="0">
+              <a:spcBef>
+                <a:spcPts val="0"/>
+              </a:spcBef>
+              <a:spcAft>
+                <a:spcPts val="0"/>
+              </a:spcAft>
+              <a:buNone/>
+            </a:pPr>
+            <a:endParaRPr lang="en-US" altLang="zh-CN" dirty="0"/>
+          </a:p>
+          <a:p>
+            <a:pPr marL="114300" indent="0" fontAlgn="base">
+              <a:buNone/>
+            </a:pPr>
+            <a:endParaRPr lang="nl-NL" altLang="zh-CN" dirty="0"/>
+          </a:p>
+          <a:p>
+            <a:endParaRPr lang="zh-CN" altLang="en-US" dirty="0"/>
+          </a:p>
+          <a:p>
+            <a:pPr marL="0" lvl="0" indent="0" algn="l" rtl="0">
+              <a:spcBef>
+                <a:spcPts val="0"/>
+              </a:spcBef>
+              <a:spcAft>
+                <a:spcPts val="0"/>
+              </a:spcAft>
+              <a:buNone/>
+            </a:pPr>
+            <a:endParaRPr dirty="0"/>
+          </a:p>
+        </p:txBody>
+      </p:sp>
+    </p:spTree>
+  </p:cSld>
+  <p:clrMapOvr>
+    <a:masterClrMapping/>
+  </p:clrMapOvr>
+</p:notes>
+</file>
+
 <file path=ppt/slideLayouts/slideLayout1.xml><?xml version="1.0" encoding="utf-8"?>
 <p:sldLayout xmlns:a="http://schemas.openxmlformats.org/drawingml/2006/main" xmlns:r="http://schemas.openxmlformats.org/officeDocument/2006/relationships" xmlns:p="http://schemas.openxmlformats.org/presentationml/2006/main" matchingName="Section header" type="secHead">
   <p:cSld name="SECTION_HEADER">
@@ -12093,7 +12431,7 @@
           <a:p>
             <a:fld id="{FB221443-D73C-634A-A910-7320408C156D}" type="datetimeFigureOut">
               <a:rPr lang="en-US" smtClean="0"/>
-              <a:t>1/31/2026</a:t>
+              <a:t>4/16/2026</a:t>
             </a:fld>
             <a:endParaRPr lang="en-US"/>
           </a:p>
@@ -18962,6 +19300,1144 @@
         <p14:creationId xmlns:p14="http://schemas.microsoft.com/office/powerpoint/2010/main" val="4237756104"/>
       </p:ext>
     </p:extLst>
+  </p:cSld>
+  <p:clrMapOvr>
+    <a:masterClrMapping/>
+  </p:clrMapOvr>
+</p:sld>
+</file>
+
+<file path=ppt/slides/slide11.xml><?xml version="1.0" encoding="utf-8"?>
+<p:sld xmlns:a="http://schemas.openxmlformats.org/drawingml/2006/main" xmlns:r="http://schemas.openxmlformats.org/officeDocument/2006/relationships" xmlns:p="http://schemas.openxmlformats.org/presentationml/2006/main">
+  <p:cSld>
+    <p:spTree>
+      <p:nvGrpSpPr>
+        <p:cNvPr id="1" name="Shape 1315"/>
+        <p:cNvGrpSpPr/>
+        <p:nvPr/>
+      </p:nvGrpSpPr>
+      <p:grpSpPr>
+        <a:xfrm>
+          <a:off x="0" y="0"/>
+          <a:ext cx="0" cy="0"/>
+          <a:chOff x="0" y="0"/>
+          <a:chExt cx="0" cy="0"/>
+        </a:xfrm>
+      </p:grpSpPr>
+      <p:sp>
+        <p:nvSpPr>
+          <p:cNvPr id="1316" name="Google Shape;1316;p86"/>
+          <p:cNvSpPr txBox="1">
+            <a:spLocks noGrp="1"/>
+          </p:cNvSpPr>
+          <p:nvPr>
+            <p:ph type="title"/>
+          </p:nvPr>
+        </p:nvSpPr>
+        <p:spPr>
+          <a:xfrm>
+            <a:off x="0" y="0"/>
+            <a:ext cx="8520600" cy="393600"/>
+          </a:xfrm>
+          <a:prstGeom prst="rect">
+            <a:avLst/>
+          </a:prstGeom>
+        </p:spPr>
+        <p:txBody>
+          <a:bodyPr spcFirstLastPara="1" wrap="square" lIns="91425" tIns="91425" rIns="91425" bIns="91425" anchor="t" anchorCtr="0">
+            <a:noAutofit/>
+          </a:bodyPr>
+          <a:lstStyle/>
+          <a:p>
+            <a:pPr marL="0" lvl="0" indent="0" algn="l" rtl="0">
+              <a:spcBef>
+                <a:spcPts val="0"/>
+              </a:spcBef>
+              <a:spcAft>
+                <a:spcPts val="0"/>
+              </a:spcAft>
+              <a:buNone/>
+            </a:pPr>
+            <a:r>
+              <a:rPr lang="en" dirty="0"/>
+              <a:t>Ack-Based Loss Detection: Cumulative Acks</a:t>
+            </a:r>
+            <a:endParaRPr dirty="0"/>
+          </a:p>
+        </p:txBody>
+      </p:sp>
+      <p:sp>
+        <p:nvSpPr>
+          <p:cNvPr id="1317" name="Google Shape;1317;p86"/>
+          <p:cNvSpPr txBox="1">
+            <a:spLocks noGrp="1"/>
+          </p:cNvSpPr>
+          <p:nvPr>
+            <p:ph type="body" idx="1"/>
+          </p:nvPr>
+        </p:nvSpPr>
+        <p:spPr>
+          <a:xfrm>
+            <a:off x="107050" y="402200"/>
+            <a:ext cx="8909700" cy="1711200"/>
+          </a:xfrm>
+          <a:prstGeom prst="rect">
+            <a:avLst/>
+          </a:prstGeom>
+        </p:spPr>
+        <p:txBody>
+          <a:bodyPr spcFirstLastPara="1" wrap="square" lIns="91425" tIns="91425" rIns="91425" bIns="91425" anchor="t" anchorCtr="0">
+            <a:noAutofit/>
+          </a:bodyPr>
+          <a:lstStyle/>
+          <a:p>
+            <a:pPr marL="0" lvl="0" indent="0" algn="l" rtl="0">
+              <a:spcBef>
+                <a:spcPts val="600"/>
+              </a:spcBef>
+              <a:spcAft>
+                <a:spcPts val="0"/>
+              </a:spcAft>
+              <a:buNone/>
+            </a:pPr>
+            <a:r>
+              <a:rPr lang="en" dirty="0"/>
+              <a:t>Cumulative acks: Declare loss if </a:t>
+            </a:r>
+            <a:r>
+              <a:rPr lang="en" i="1" dirty="0"/>
+              <a:t>k</a:t>
+            </a:r>
+            <a:r>
+              <a:rPr lang="en" dirty="0"/>
+              <a:t> </a:t>
+            </a:r>
+            <a:r>
+              <a:rPr lang="en" b="1" dirty="0"/>
+              <a:t>duplicate acks</a:t>
+            </a:r>
+            <a:r>
+              <a:rPr lang="en" dirty="0"/>
+              <a:t> are received. </a:t>
+            </a:r>
+            <a:endParaRPr lang="en-US" dirty="0"/>
+          </a:p>
+          <a:p>
+            <a:pPr marL="0" lvl="0" indent="0" algn="l" rtl="0">
+              <a:spcBef>
+                <a:spcPts val="600"/>
+              </a:spcBef>
+              <a:spcAft>
+                <a:spcPts val="0"/>
+              </a:spcAft>
+              <a:buNone/>
+            </a:pPr>
+            <a:r>
+              <a:rPr lang="en-US" dirty="0">
+                <a:solidFill>
+                  <a:srgbClr val="C00000"/>
+                </a:solidFill>
+              </a:rPr>
+              <a:t>k = 3 </a:t>
+            </a:r>
+            <a:r>
+              <a:rPr lang="en-US" dirty="0"/>
+              <a:t>was chosen historically (empirical compromise between reordering and loss).</a:t>
+            </a:r>
+          </a:p>
+          <a:p>
+            <a:pPr marL="0" lvl="0" indent="0" algn="l" rtl="0">
+              <a:spcBef>
+                <a:spcPts val="600"/>
+              </a:spcBef>
+              <a:spcAft>
+                <a:spcPts val="0"/>
+              </a:spcAft>
+              <a:buNone/>
+            </a:pPr>
+            <a:r>
+              <a:rPr lang="en-US" dirty="0"/>
+              <a:t>Example: Later packets (6, 7, 8) received, but there's a gap, so the "up to 4" cumulative ack cannot increase.</a:t>
+            </a:r>
+          </a:p>
+        </p:txBody>
+      </p:sp>
+      <p:sp>
+        <p:nvSpPr>
+          <p:cNvPr id="1318" name="Google Shape;1318;p86"/>
+          <p:cNvSpPr/>
+          <p:nvPr/>
+        </p:nvSpPr>
+        <p:spPr>
+          <a:xfrm>
+            <a:off x="287400" y="2199950"/>
+            <a:ext cx="4848000" cy="1948800"/>
+          </a:xfrm>
+          <a:prstGeom prst="rect">
+            <a:avLst/>
+          </a:prstGeom>
+          <a:solidFill>
+            <a:srgbClr val="D9EAD3"/>
+          </a:solidFill>
+          <a:ln w="9525" cap="flat" cmpd="sng">
+            <a:solidFill>
+              <a:schemeClr val="dk2"/>
+            </a:solidFill>
+            <a:prstDash val="solid"/>
+            <a:round/>
+            <a:headEnd type="none" w="sm" len="sm"/>
+            <a:tailEnd type="none" w="sm" len="sm"/>
+          </a:ln>
+        </p:spPr>
+        <p:txBody>
+          <a:bodyPr spcFirstLastPara="1" wrap="square" lIns="91425" tIns="91425" rIns="91425" bIns="91425" anchor="t" anchorCtr="0">
+            <a:noAutofit/>
+          </a:bodyPr>
+          <a:lstStyle/>
+          <a:p>
+            <a:pPr marL="0" lvl="0" indent="0" algn="ctr" rtl="0">
+              <a:spcBef>
+                <a:spcPts val="0"/>
+              </a:spcBef>
+              <a:spcAft>
+                <a:spcPts val="0"/>
+              </a:spcAft>
+              <a:buNone/>
+            </a:pPr>
+            <a:r>
+              <a:rPr lang="en" dirty="0">
+                <a:latin typeface="Roboto"/>
+                <a:ea typeface="Roboto"/>
+                <a:cs typeface="Roboto"/>
+                <a:sym typeface="Roboto"/>
+              </a:rPr>
+              <a:t>Sender</a:t>
+            </a:r>
+            <a:endParaRPr dirty="0">
+              <a:latin typeface="Roboto"/>
+              <a:ea typeface="Roboto"/>
+              <a:cs typeface="Roboto"/>
+              <a:sym typeface="Roboto"/>
+            </a:endParaRPr>
+          </a:p>
+        </p:txBody>
+      </p:sp>
+      <p:sp>
+        <p:nvSpPr>
+          <p:cNvPr id="1319" name="Google Shape;1319;p86"/>
+          <p:cNvSpPr/>
+          <p:nvPr/>
+        </p:nvSpPr>
+        <p:spPr>
+          <a:xfrm>
+            <a:off x="484501" y="3078050"/>
+            <a:ext cx="961800" cy="334800"/>
+          </a:xfrm>
+          <a:prstGeom prst="roundRect">
+            <a:avLst>
+              <a:gd name="adj" fmla="val 16667"/>
+            </a:avLst>
+          </a:prstGeom>
+          <a:noFill/>
+          <a:ln w="9525" cap="flat" cmpd="sng">
+            <a:solidFill>
+              <a:schemeClr val="dk2"/>
+            </a:solidFill>
+            <a:prstDash val="solid"/>
+            <a:round/>
+            <a:headEnd type="none" w="sm" len="sm"/>
+            <a:tailEnd type="none" w="sm" len="sm"/>
+          </a:ln>
+        </p:spPr>
+        <p:txBody>
+          <a:bodyPr spcFirstLastPara="1" wrap="square" lIns="91425" tIns="91425" rIns="91425" bIns="91425" anchor="ctr" anchorCtr="0">
+            <a:noAutofit/>
+          </a:bodyPr>
+          <a:lstStyle/>
+          <a:p>
+            <a:pPr marL="0" lvl="0" indent="0" algn="ctr" rtl="0">
+              <a:spcBef>
+                <a:spcPts val="0"/>
+              </a:spcBef>
+              <a:spcAft>
+                <a:spcPts val="0"/>
+              </a:spcAft>
+              <a:buNone/>
+            </a:pPr>
+            <a:r>
+              <a:rPr lang="en">
+                <a:latin typeface="Roboto"/>
+                <a:ea typeface="Roboto"/>
+                <a:cs typeface="Roboto"/>
+                <a:sym typeface="Roboto"/>
+              </a:rPr>
+              <a:t>up to 1</a:t>
+            </a:r>
+            <a:endParaRPr>
+              <a:latin typeface="Roboto"/>
+              <a:ea typeface="Roboto"/>
+              <a:cs typeface="Roboto"/>
+              <a:sym typeface="Roboto"/>
+            </a:endParaRPr>
+          </a:p>
+        </p:txBody>
+      </p:sp>
+      <p:sp>
+        <p:nvSpPr>
+          <p:cNvPr id="1320" name="Google Shape;1320;p86"/>
+          <p:cNvSpPr/>
+          <p:nvPr/>
+        </p:nvSpPr>
+        <p:spPr>
+          <a:xfrm>
+            <a:off x="1648501" y="3078050"/>
+            <a:ext cx="961800" cy="334800"/>
+          </a:xfrm>
+          <a:prstGeom prst="roundRect">
+            <a:avLst>
+              <a:gd name="adj" fmla="val 16667"/>
+            </a:avLst>
+          </a:prstGeom>
+          <a:noFill/>
+          <a:ln w="9525" cap="flat" cmpd="sng">
+            <a:solidFill>
+              <a:schemeClr val="dk2"/>
+            </a:solidFill>
+            <a:prstDash val="solid"/>
+            <a:round/>
+            <a:headEnd type="none" w="sm" len="sm"/>
+            <a:tailEnd type="none" w="sm" len="sm"/>
+          </a:ln>
+        </p:spPr>
+        <p:txBody>
+          <a:bodyPr spcFirstLastPara="1" wrap="square" lIns="91425" tIns="91425" rIns="91425" bIns="91425" anchor="ctr" anchorCtr="0">
+            <a:noAutofit/>
+          </a:bodyPr>
+          <a:lstStyle/>
+          <a:p>
+            <a:pPr marL="0" lvl="0" indent="0" algn="ctr" rtl="0">
+              <a:spcBef>
+                <a:spcPts val="0"/>
+              </a:spcBef>
+              <a:spcAft>
+                <a:spcPts val="0"/>
+              </a:spcAft>
+              <a:buNone/>
+            </a:pPr>
+            <a:r>
+              <a:rPr lang="en">
+                <a:latin typeface="Roboto"/>
+                <a:ea typeface="Roboto"/>
+                <a:cs typeface="Roboto"/>
+                <a:sym typeface="Roboto"/>
+              </a:rPr>
+              <a:t>up to 2</a:t>
+            </a:r>
+            <a:endParaRPr>
+              <a:latin typeface="Roboto"/>
+              <a:ea typeface="Roboto"/>
+              <a:cs typeface="Roboto"/>
+              <a:sym typeface="Roboto"/>
+            </a:endParaRPr>
+          </a:p>
+        </p:txBody>
+      </p:sp>
+      <p:sp>
+        <p:nvSpPr>
+          <p:cNvPr id="1321" name="Google Shape;1321;p86"/>
+          <p:cNvSpPr/>
+          <p:nvPr/>
+        </p:nvSpPr>
+        <p:spPr>
+          <a:xfrm>
+            <a:off x="2812501" y="3078050"/>
+            <a:ext cx="961800" cy="334800"/>
+          </a:xfrm>
+          <a:prstGeom prst="roundRect">
+            <a:avLst>
+              <a:gd name="adj" fmla="val 16667"/>
+            </a:avLst>
+          </a:prstGeom>
+          <a:noFill/>
+          <a:ln w="9525" cap="flat" cmpd="sng">
+            <a:solidFill>
+              <a:schemeClr val="dk2"/>
+            </a:solidFill>
+            <a:prstDash val="solid"/>
+            <a:round/>
+            <a:headEnd type="none" w="sm" len="sm"/>
+            <a:tailEnd type="none" w="sm" len="sm"/>
+          </a:ln>
+        </p:spPr>
+        <p:txBody>
+          <a:bodyPr spcFirstLastPara="1" wrap="square" lIns="91425" tIns="91425" rIns="91425" bIns="91425" anchor="ctr" anchorCtr="0">
+            <a:noAutofit/>
+          </a:bodyPr>
+          <a:lstStyle/>
+          <a:p>
+            <a:pPr marL="0" lvl="0" indent="0" algn="ctr" rtl="0">
+              <a:spcBef>
+                <a:spcPts val="0"/>
+              </a:spcBef>
+              <a:spcAft>
+                <a:spcPts val="0"/>
+              </a:spcAft>
+              <a:buNone/>
+            </a:pPr>
+            <a:r>
+              <a:rPr lang="en">
+                <a:latin typeface="Roboto"/>
+                <a:ea typeface="Roboto"/>
+                <a:cs typeface="Roboto"/>
+                <a:sym typeface="Roboto"/>
+              </a:rPr>
+              <a:t>up to 3</a:t>
+            </a:r>
+            <a:endParaRPr>
+              <a:latin typeface="Roboto"/>
+              <a:ea typeface="Roboto"/>
+              <a:cs typeface="Roboto"/>
+              <a:sym typeface="Roboto"/>
+            </a:endParaRPr>
+          </a:p>
+        </p:txBody>
+      </p:sp>
+      <p:sp>
+        <p:nvSpPr>
+          <p:cNvPr id="1322" name="Google Shape;1322;p86"/>
+          <p:cNvSpPr/>
+          <p:nvPr/>
+        </p:nvSpPr>
+        <p:spPr>
+          <a:xfrm>
+            <a:off x="3976501" y="3078050"/>
+            <a:ext cx="961800" cy="334800"/>
+          </a:xfrm>
+          <a:prstGeom prst="roundRect">
+            <a:avLst>
+              <a:gd name="adj" fmla="val 16667"/>
+            </a:avLst>
+          </a:prstGeom>
+          <a:noFill/>
+          <a:ln w="9525" cap="flat" cmpd="sng">
+            <a:solidFill>
+              <a:schemeClr val="dk2"/>
+            </a:solidFill>
+            <a:prstDash val="solid"/>
+            <a:round/>
+            <a:headEnd type="none" w="sm" len="sm"/>
+            <a:tailEnd type="none" w="sm" len="sm"/>
+          </a:ln>
+        </p:spPr>
+        <p:txBody>
+          <a:bodyPr spcFirstLastPara="1" wrap="square" lIns="91425" tIns="91425" rIns="91425" bIns="91425" anchor="ctr" anchorCtr="0">
+            <a:noAutofit/>
+          </a:bodyPr>
+          <a:lstStyle/>
+          <a:p>
+            <a:pPr marL="0" lvl="0" indent="0" algn="ctr" rtl="0">
+              <a:spcBef>
+                <a:spcPts val="0"/>
+              </a:spcBef>
+              <a:spcAft>
+                <a:spcPts val="0"/>
+              </a:spcAft>
+              <a:buNone/>
+            </a:pPr>
+            <a:r>
+              <a:rPr lang="en">
+                <a:latin typeface="Roboto"/>
+                <a:ea typeface="Roboto"/>
+                <a:cs typeface="Roboto"/>
+                <a:sym typeface="Roboto"/>
+              </a:rPr>
+              <a:t>up to 4</a:t>
+            </a:r>
+            <a:endParaRPr>
+              <a:latin typeface="Roboto"/>
+              <a:ea typeface="Roboto"/>
+              <a:cs typeface="Roboto"/>
+              <a:sym typeface="Roboto"/>
+            </a:endParaRPr>
+          </a:p>
+        </p:txBody>
+      </p:sp>
+      <p:sp>
+        <p:nvSpPr>
+          <p:cNvPr id="1323" name="Google Shape;1323;p86"/>
+          <p:cNvSpPr/>
+          <p:nvPr/>
+        </p:nvSpPr>
+        <p:spPr>
+          <a:xfrm>
+            <a:off x="1648501" y="3611450"/>
+            <a:ext cx="961800" cy="334800"/>
+          </a:xfrm>
+          <a:prstGeom prst="roundRect">
+            <a:avLst>
+              <a:gd name="adj" fmla="val 16667"/>
+            </a:avLst>
+          </a:prstGeom>
+          <a:noFill/>
+          <a:ln w="9525" cap="flat" cmpd="sng">
+            <a:solidFill>
+              <a:schemeClr val="dk2"/>
+            </a:solidFill>
+            <a:prstDash val="solid"/>
+            <a:round/>
+            <a:headEnd type="none" w="sm" len="sm"/>
+            <a:tailEnd type="none" w="sm" len="sm"/>
+          </a:ln>
+        </p:spPr>
+        <p:txBody>
+          <a:bodyPr spcFirstLastPara="1" wrap="square" lIns="91425" tIns="91425" rIns="91425" bIns="91425" anchor="ctr" anchorCtr="0">
+            <a:noAutofit/>
+          </a:bodyPr>
+          <a:lstStyle/>
+          <a:p>
+            <a:pPr marL="0" lvl="0" indent="0" algn="ctr" rtl="0">
+              <a:spcBef>
+                <a:spcPts val="0"/>
+              </a:spcBef>
+              <a:spcAft>
+                <a:spcPts val="0"/>
+              </a:spcAft>
+              <a:buNone/>
+            </a:pPr>
+            <a:r>
+              <a:rPr lang="en">
+                <a:latin typeface="Roboto"/>
+                <a:ea typeface="Roboto"/>
+                <a:cs typeface="Roboto"/>
+                <a:sym typeface="Roboto"/>
+              </a:rPr>
+              <a:t>up to 4</a:t>
+            </a:r>
+            <a:endParaRPr>
+              <a:latin typeface="Roboto"/>
+              <a:ea typeface="Roboto"/>
+              <a:cs typeface="Roboto"/>
+              <a:sym typeface="Roboto"/>
+            </a:endParaRPr>
+          </a:p>
+        </p:txBody>
+      </p:sp>
+      <p:sp>
+        <p:nvSpPr>
+          <p:cNvPr id="1324" name="Google Shape;1324;p86"/>
+          <p:cNvSpPr/>
+          <p:nvPr/>
+        </p:nvSpPr>
+        <p:spPr>
+          <a:xfrm>
+            <a:off x="2812501" y="3611450"/>
+            <a:ext cx="961800" cy="334800"/>
+          </a:xfrm>
+          <a:prstGeom prst="roundRect">
+            <a:avLst>
+              <a:gd name="adj" fmla="val 16667"/>
+            </a:avLst>
+          </a:prstGeom>
+          <a:noFill/>
+          <a:ln w="9525" cap="flat" cmpd="sng">
+            <a:solidFill>
+              <a:schemeClr val="dk2"/>
+            </a:solidFill>
+            <a:prstDash val="solid"/>
+            <a:round/>
+            <a:headEnd type="none" w="sm" len="sm"/>
+            <a:tailEnd type="none" w="sm" len="sm"/>
+          </a:ln>
+        </p:spPr>
+        <p:txBody>
+          <a:bodyPr spcFirstLastPara="1" wrap="square" lIns="91425" tIns="91425" rIns="91425" bIns="91425" anchor="ctr" anchorCtr="0">
+            <a:noAutofit/>
+          </a:bodyPr>
+          <a:lstStyle/>
+          <a:p>
+            <a:pPr marL="0" lvl="0" indent="0" algn="ctr" rtl="0">
+              <a:spcBef>
+                <a:spcPts val="0"/>
+              </a:spcBef>
+              <a:spcAft>
+                <a:spcPts val="0"/>
+              </a:spcAft>
+              <a:buNone/>
+            </a:pPr>
+            <a:r>
+              <a:rPr lang="en">
+                <a:latin typeface="Roboto"/>
+                <a:ea typeface="Roboto"/>
+                <a:cs typeface="Roboto"/>
+                <a:sym typeface="Roboto"/>
+              </a:rPr>
+              <a:t>up to 4</a:t>
+            </a:r>
+            <a:endParaRPr>
+              <a:latin typeface="Roboto"/>
+              <a:ea typeface="Roboto"/>
+              <a:cs typeface="Roboto"/>
+              <a:sym typeface="Roboto"/>
+            </a:endParaRPr>
+          </a:p>
+        </p:txBody>
+      </p:sp>
+      <p:sp>
+        <p:nvSpPr>
+          <p:cNvPr id="1325" name="Google Shape;1325;p86"/>
+          <p:cNvSpPr/>
+          <p:nvPr/>
+        </p:nvSpPr>
+        <p:spPr>
+          <a:xfrm>
+            <a:off x="3976501" y="3611450"/>
+            <a:ext cx="961800" cy="334800"/>
+          </a:xfrm>
+          <a:prstGeom prst="roundRect">
+            <a:avLst>
+              <a:gd name="adj" fmla="val 16667"/>
+            </a:avLst>
+          </a:prstGeom>
+          <a:noFill/>
+          <a:ln w="9525" cap="flat" cmpd="sng">
+            <a:solidFill>
+              <a:schemeClr val="dk2"/>
+            </a:solidFill>
+            <a:prstDash val="solid"/>
+            <a:round/>
+            <a:headEnd type="none" w="sm" len="sm"/>
+            <a:tailEnd type="none" w="sm" len="sm"/>
+          </a:ln>
+        </p:spPr>
+        <p:txBody>
+          <a:bodyPr spcFirstLastPara="1" wrap="square" lIns="91425" tIns="91425" rIns="91425" bIns="91425" anchor="ctr" anchorCtr="0">
+            <a:noAutofit/>
+          </a:bodyPr>
+          <a:lstStyle/>
+          <a:p>
+            <a:pPr marL="0" lvl="0" indent="0" algn="ctr" rtl="0">
+              <a:spcBef>
+                <a:spcPts val="0"/>
+              </a:spcBef>
+              <a:spcAft>
+                <a:spcPts val="0"/>
+              </a:spcAft>
+              <a:buNone/>
+            </a:pPr>
+            <a:r>
+              <a:rPr lang="en">
+                <a:latin typeface="Roboto"/>
+                <a:ea typeface="Roboto"/>
+                <a:cs typeface="Roboto"/>
+                <a:sym typeface="Roboto"/>
+              </a:rPr>
+              <a:t>up to 4</a:t>
+            </a:r>
+            <a:endParaRPr>
+              <a:latin typeface="Roboto"/>
+              <a:ea typeface="Roboto"/>
+              <a:cs typeface="Roboto"/>
+              <a:sym typeface="Roboto"/>
+            </a:endParaRPr>
+          </a:p>
+        </p:txBody>
+      </p:sp>
+      <p:sp>
+        <p:nvSpPr>
+          <p:cNvPr id="1326" name="Google Shape;1326;p86"/>
+          <p:cNvSpPr/>
+          <p:nvPr/>
+        </p:nvSpPr>
+        <p:spPr>
+          <a:xfrm>
+            <a:off x="5572200" y="2495550"/>
+            <a:ext cx="3235800" cy="1907100"/>
+          </a:xfrm>
+          <a:prstGeom prst="wedgeRoundRectCallout">
+            <a:avLst>
+              <a:gd name="adj1" fmla="val -59537"/>
+              <a:gd name="adj2" fmla="val -44670"/>
+              <a:gd name="adj3" fmla="val 0"/>
+            </a:avLst>
+          </a:prstGeom>
+          <a:noFill/>
+          <a:ln w="9525" cap="flat" cmpd="sng">
+            <a:solidFill>
+              <a:schemeClr val="dk2"/>
+            </a:solidFill>
+            <a:prstDash val="solid"/>
+            <a:round/>
+            <a:headEnd type="none" w="sm" len="sm"/>
+            <a:tailEnd type="none" w="sm" len="sm"/>
+          </a:ln>
+        </p:spPr>
+        <p:txBody>
+          <a:bodyPr spcFirstLastPara="1" wrap="square" lIns="91425" tIns="91425" rIns="91425" bIns="91425" anchor="ctr" anchorCtr="0">
+            <a:noAutofit/>
+          </a:bodyPr>
+          <a:lstStyle/>
+          <a:p>
+            <a:pPr marL="0" lvl="0" indent="0" algn="l" rtl="0">
+              <a:spcBef>
+                <a:spcPts val="0"/>
+              </a:spcBef>
+              <a:spcAft>
+                <a:spcPts val="0"/>
+              </a:spcAft>
+              <a:buNone/>
+            </a:pPr>
+            <a:r>
+              <a:rPr lang="en">
+                <a:latin typeface="Roboto"/>
+                <a:ea typeface="Roboto"/>
+                <a:cs typeface="Roboto"/>
+                <a:sym typeface="Roboto"/>
+              </a:rPr>
+              <a:t>I received 3 copies of "up to 4" (plus the original).</a:t>
+            </a:r>
+            <a:endParaRPr>
+              <a:latin typeface="Roboto"/>
+              <a:ea typeface="Roboto"/>
+              <a:cs typeface="Roboto"/>
+              <a:sym typeface="Roboto"/>
+            </a:endParaRPr>
+          </a:p>
+          <a:p>
+            <a:pPr marL="0" lvl="0" indent="0" algn="l" rtl="0">
+              <a:spcBef>
+                <a:spcPts val="0"/>
+              </a:spcBef>
+              <a:spcAft>
+                <a:spcPts val="0"/>
+              </a:spcAft>
+              <a:buNone/>
+            </a:pPr>
+            <a:endParaRPr>
+              <a:latin typeface="Roboto"/>
+              <a:ea typeface="Roboto"/>
+              <a:cs typeface="Roboto"/>
+              <a:sym typeface="Roboto"/>
+            </a:endParaRPr>
+          </a:p>
+          <a:p>
+            <a:pPr marL="0" lvl="0" indent="0" algn="l" rtl="0">
+              <a:spcBef>
+                <a:spcPts val="0"/>
+              </a:spcBef>
+              <a:spcAft>
+                <a:spcPts val="0"/>
+              </a:spcAft>
+              <a:buNone/>
+            </a:pPr>
+            <a:r>
+              <a:rPr lang="en">
+                <a:latin typeface="Roboto"/>
+                <a:ea typeface="Roboto"/>
+                <a:cs typeface="Roboto"/>
+                <a:sym typeface="Roboto"/>
+              </a:rPr>
+              <a:t>That means 3 extra packets were received (and none of them are 5).</a:t>
+            </a:r>
+            <a:endParaRPr>
+              <a:latin typeface="Roboto"/>
+              <a:ea typeface="Roboto"/>
+              <a:cs typeface="Roboto"/>
+              <a:sym typeface="Roboto"/>
+            </a:endParaRPr>
+          </a:p>
+          <a:p>
+            <a:pPr marL="0" lvl="0" indent="0" algn="l" rtl="0">
+              <a:spcBef>
+                <a:spcPts val="0"/>
+              </a:spcBef>
+              <a:spcAft>
+                <a:spcPts val="0"/>
+              </a:spcAft>
+              <a:buNone/>
+            </a:pPr>
+            <a:endParaRPr>
+              <a:latin typeface="Roboto"/>
+              <a:ea typeface="Roboto"/>
+              <a:cs typeface="Roboto"/>
+              <a:sym typeface="Roboto"/>
+            </a:endParaRPr>
+          </a:p>
+          <a:p>
+            <a:pPr marL="0" lvl="0" indent="0" algn="l" rtl="0">
+              <a:spcBef>
+                <a:spcPts val="0"/>
+              </a:spcBef>
+              <a:spcAft>
+                <a:spcPts val="0"/>
+              </a:spcAft>
+              <a:buClr>
+                <a:schemeClr val="dk1"/>
+              </a:buClr>
+              <a:buSzPts val="1100"/>
+              <a:buFont typeface="Arial"/>
+              <a:buNone/>
+            </a:pPr>
+            <a:r>
+              <a:rPr lang="en">
+                <a:solidFill>
+                  <a:schemeClr val="dk1"/>
+                </a:solidFill>
+                <a:latin typeface="Roboto"/>
+                <a:ea typeface="Roboto"/>
+                <a:cs typeface="Roboto"/>
+                <a:sym typeface="Roboto"/>
+              </a:rPr>
+              <a:t>I'll assume 5 is lost and resend it.</a:t>
+            </a:r>
+            <a:endParaRPr>
+              <a:latin typeface="Roboto"/>
+              <a:ea typeface="Roboto"/>
+              <a:cs typeface="Roboto"/>
+              <a:sym typeface="Roboto"/>
+            </a:endParaRPr>
+          </a:p>
+        </p:txBody>
+      </p:sp>
+      <p:sp>
+        <p:nvSpPr>
+          <p:cNvPr id="1327" name="Google Shape;1327;p86"/>
+          <p:cNvSpPr txBox="1"/>
+          <p:nvPr/>
+        </p:nvSpPr>
+        <p:spPr>
+          <a:xfrm>
+            <a:off x="1753500" y="4295513"/>
+            <a:ext cx="751800" cy="518700"/>
+          </a:xfrm>
+          <a:prstGeom prst="rect">
+            <a:avLst/>
+          </a:prstGeom>
+          <a:noFill/>
+          <a:ln>
+            <a:noFill/>
+          </a:ln>
+        </p:spPr>
+        <p:txBody>
+          <a:bodyPr spcFirstLastPara="1" wrap="square" lIns="27425" tIns="27425" rIns="27425" bIns="27425" anchor="t" anchorCtr="0">
+            <a:spAutoFit/>
+          </a:bodyPr>
+          <a:lstStyle/>
+          <a:p>
+            <a:pPr marL="0" lvl="0" indent="0" algn="ctr" rtl="0">
+              <a:lnSpc>
+                <a:spcPct val="115000"/>
+              </a:lnSpc>
+              <a:spcBef>
+                <a:spcPts val="600"/>
+              </a:spcBef>
+              <a:spcAft>
+                <a:spcPts val="0"/>
+              </a:spcAft>
+              <a:buNone/>
+            </a:pPr>
+            <a:r>
+              <a:rPr lang="en">
+                <a:solidFill>
+                  <a:schemeClr val="accent2"/>
+                </a:solidFill>
+                <a:latin typeface="Roboto"/>
+                <a:ea typeface="Roboto"/>
+                <a:cs typeface="Roboto"/>
+                <a:sym typeface="Roboto"/>
+              </a:rPr>
+              <a:t>ack for 6</a:t>
+            </a:r>
+            <a:br>
+              <a:rPr lang="en">
+                <a:solidFill>
+                  <a:schemeClr val="accent2"/>
+                </a:solidFill>
+                <a:latin typeface="Roboto"/>
+                <a:ea typeface="Roboto"/>
+                <a:cs typeface="Roboto"/>
+                <a:sym typeface="Roboto"/>
+              </a:rPr>
+            </a:br>
+            <a:r>
+              <a:rPr lang="en">
+                <a:solidFill>
+                  <a:schemeClr val="accent2"/>
+                </a:solidFill>
+                <a:latin typeface="Roboto"/>
+                <a:ea typeface="Roboto"/>
+                <a:cs typeface="Roboto"/>
+                <a:sym typeface="Roboto"/>
+              </a:rPr>
+              <a:t>dup #1</a:t>
+            </a:r>
+            <a:endParaRPr>
+              <a:solidFill>
+                <a:schemeClr val="accent2"/>
+              </a:solidFill>
+              <a:latin typeface="Roboto"/>
+              <a:ea typeface="Roboto"/>
+              <a:cs typeface="Roboto"/>
+              <a:sym typeface="Roboto"/>
+            </a:endParaRPr>
+          </a:p>
+        </p:txBody>
+      </p:sp>
+      <p:cxnSp>
+        <p:nvCxnSpPr>
+          <p:cNvPr id="1328" name="Google Shape;1328;p86"/>
+          <p:cNvCxnSpPr>
+            <a:stCxn id="1327" idx="0"/>
+            <a:endCxn id="1323" idx="2"/>
+          </p:cNvCxnSpPr>
+          <p:nvPr/>
+        </p:nvCxnSpPr>
+        <p:spPr>
+          <a:xfrm rot="10800000">
+            <a:off x="2129400" y="3946313"/>
+            <a:ext cx="0" cy="349200"/>
+          </a:xfrm>
+          <a:prstGeom prst="straightConnector1">
+            <a:avLst/>
+          </a:prstGeom>
+          <a:noFill/>
+          <a:ln w="19050" cap="flat" cmpd="sng">
+            <a:solidFill>
+              <a:schemeClr val="accent2"/>
+            </a:solidFill>
+            <a:prstDash val="solid"/>
+            <a:round/>
+            <a:headEnd type="none" w="med" len="med"/>
+            <a:tailEnd type="triangle" w="med" len="med"/>
+          </a:ln>
+        </p:spPr>
+      </p:cxnSp>
+      <p:sp>
+        <p:nvSpPr>
+          <p:cNvPr id="1329" name="Google Shape;1329;p86"/>
+          <p:cNvSpPr txBox="1"/>
+          <p:nvPr/>
+        </p:nvSpPr>
+        <p:spPr>
+          <a:xfrm>
+            <a:off x="2917500" y="4295513"/>
+            <a:ext cx="751800" cy="518700"/>
+          </a:xfrm>
+          <a:prstGeom prst="rect">
+            <a:avLst/>
+          </a:prstGeom>
+          <a:noFill/>
+          <a:ln>
+            <a:noFill/>
+          </a:ln>
+        </p:spPr>
+        <p:txBody>
+          <a:bodyPr spcFirstLastPara="1" wrap="square" lIns="27425" tIns="27425" rIns="27425" bIns="27425" anchor="t" anchorCtr="0">
+            <a:spAutoFit/>
+          </a:bodyPr>
+          <a:lstStyle/>
+          <a:p>
+            <a:pPr marL="0" lvl="0" indent="0" algn="ctr" rtl="0">
+              <a:lnSpc>
+                <a:spcPct val="115000"/>
+              </a:lnSpc>
+              <a:spcBef>
+                <a:spcPts val="600"/>
+              </a:spcBef>
+              <a:spcAft>
+                <a:spcPts val="0"/>
+              </a:spcAft>
+              <a:buNone/>
+            </a:pPr>
+            <a:r>
+              <a:rPr lang="en">
+                <a:solidFill>
+                  <a:schemeClr val="accent2"/>
+                </a:solidFill>
+                <a:latin typeface="Roboto"/>
+                <a:ea typeface="Roboto"/>
+                <a:cs typeface="Roboto"/>
+                <a:sym typeface="Roboto"/>
+              </a:rPr>
+              <a:t>ack for 7</a:t>
+            </a:r>
+            <a:br>
+              <a:rPr lang="en">
+                <a:solidFill>
+                  <a:schemeClr val="accent2"/>
+                </a:solidFill>
+                <a:latin typeface="Roboto"/>
+                <a:ea typeface="Roboto"/>
+                <a:cs typeface="Roboto"/>
+                <a:sym typeface="Roboto"/>
+              </a:rPr>
+            </a:br>
+            <a:r>
+              <a:rPr lang="en">
+                <a:solidFill>
+                  <a:schemeClr val="accent2"/>
+                </a:solidFill>
+                <a:latin typeface="Roboto"/>
+                <a:ea typeface="Roboto"/>
+                <a:cs typeface="Roboto"/>
+                <a:sym typeface="Roboto"/>
+              </a:rPr>
+              <a:t>dup #2</a:t>
+            </a:r>
+            <a:endParaRPr>
+              <a:solidFill>
+                <a:schemeClr val="accent2"/>
+              </a:solidFill>
+              <a:latin typeface="Roboto"/>
+              <a:ea typeface="Roboto"/>
+              <a:cs typeface="Roboto"/>
+              <a:sym typeface="Roboto"/>
+            </a:endParaRPr>
+          </a:p>
+        </p:txBody>
+      </p:sp>
+      <p:cxnSp>
+        <p:nvCxnSpPr>
+          <p:cNvPr id="1330" name="Google Shape;1330;p86"/>
+          <p:cNvCxnSpPr>
+            <a:stCxn id="1329" idx="0"/>
+            <a:endCxn id="1324" idx="2"/>
+          </p:cNvCxnSpPr>
+          <p:nvPr/>
+        </p:nvCxnSpPr>
+        <p:spPr>
+          <a:xfrm rot="10800000">
+            <a:off x="3293400" y="3946313"/>
+            <a:ext cx="0" cy="349200"/>
+          </a:xfrm>
+          <a:prstGeom prst="straightConnector1">
+            <a:avLst/>
+          </a:prstGeom>
+          <a:noFill/>
+          <a:ln w="19050" cap="flat" cmpd="sng">
+            <a:solidFill>
+              <a:schemeClr val="accent2"/>
+            </a:solidFill>
+            <a:prstDash val="solid"/>
+            <a:round/>
+            <a:headEnd type="none" w="med" len="med"/>
+            <a:tailEnd type="triangle" w="med" len="med"/>
+          </a:ln>
+        </p:spPr>
+      </p:cxnSp>
+      <p:sp>
+        <p:nvSpPr>
+          <p:cNvPr id="1331" name="Google Shape;1331;p86"/>
+          <p:cNvSpPr txBox="1"/>
+          <p:nvPr/>
+        </p:nvSpPr>
+        <p:spPr>
+          <a:xfrm>
+            <a:off x="4081500" y="4295438"/>
+            <a:ext cx="751800" cy="518700"/>
+          </a:xfrm>
+          <a:prstGeom prst="rect">
+            <a:avLst/>
+          </a:prstGeom>
+          <a:noFill/>
+          <a:ln>
+            <a:noFill/>
+          </a:ln>
+        </p:spPr>
+        <p:txBody>
+          <a:bodyPr spcFirstLastPara="1" wrap="square" lIns="27425" tIns="27425" rIns="27425" bIns="27425" anchor="t" anchorCtr="0">
+            <a:spAutoFit/>
+          </a:bodyPr>
+          <a:lstStyle/>
+          <a:p>
+            <a:pPr marL="0" lvl="0" indent="0" algn="ctr" rtl="0">
+              <a:lnSpc>
+                <a:spcPct val="115000"/>
+              </a:lnSpc>
+              <a:spcBef>
+                <a:spcPts val="600"/>
+              </a:spcBef>
+              <a:spcAft>
+                <a:spcPts val="0"/>
+              </a:spcAft>
+              <a:buNone/>
+            </a:pPr>
+            <a:r>
+              <a:rPr lang="en">
+                <a:solidFill>
+                  <a:schemeClr val="accent2"/>
+                </a:solidFill>
+                <a:latin typeface="Roboto"/>
+                <a:ea typeface="Roboto"/>
+                <a:cs typeface="Roboto"/>
+                <a:sym typeface="Roboto"/>
+              </a:rPr>
+              <a:t>ack for 8</a:t>
+            </a:r>
+            <a:br>
+              <a:rPr lang="en">
+                <a:solidFill>
+                  <a:schemeClr val="accent2"/>
+                </a:solidFill>
+                <a:latin typeface="Roboto"/>
+                <a:ea typeface="Roboto"/>
+                <a:cs typeface="Roboto"/>
+                <a:sym typeface="Roboto"/>
+              </a:rPr>
+            </a:br>
+            <a:r>
+              <a:rPr lang="en">
+                <a:solidFill>
+                  <a:schemeClr val="accent2"/>
+                </a:solidFill>
+                <a:latin typeface="Roboto"/>
+                <a:ea typeface="Roboto"/>
+                <a:cs typeface="Roboto"/>
+                <a:sym typeface="Roboto"/>
+              </a:rPr>
+              <a:t>dup #3</a:t>
+            </a:r>
+            <a:endParaRPr>
+              <a:solidFill>
+                <a:schemeClr val="accent2"/>
+              </a:solidFill>
+              <a:latin typeface="Roboto"/>
+              <a:ea typeface="Roboto"/>
+              <a:cs typeface="Roboto"/>
+              <a:sym typeface="Roboto"/>
+            </a:endParaRPr>
+          </a:p>
+        </p:txBody>
+      </p:sp>
+      <p:cxnSp>
+        <p:nvCxnSpPr>
+          <p:cNvPr id="1332" name="Google Shape;1332;p86"/>
+          <p:cNvCxnSpPr>
+            <a:stCxn id="1331" idx="0"/>
+            <a:endCxn id="1325" idx="2"/>
+          </p:cNvCxnSpPr>
+          <p:nvPr/>
+        </p:nvCxnSpPr>
+        <p:spPr>
+          <a:xfrm rot="10800000">
+            <a:off x="4457400" y="3946238"/>
+            <a:ext cx="0" cy="349200"/>
+          </a:xfrm>
+          <a:prstGeom prst="straightConnector1">
+            <a:avLst/>
+          </a:prstGeom>
+          <a:noFill/>
+          <a:ln w="19050" cap="flat" cmpd="sng">
+            <a:solidFill>
+              <a:schemeClr val="accent2"/>
+            </a:solidFill>
+            <a:prstDash val="solid"/>
+            <a:round/>
+            <a:headEnd type="none" w="med" len="med"/>
+            <a:tailEnd type="triangle" w="med" len="med"/>
+          </a:ln>
+        </p:spPr>
+      </p:cxnSp>
+    </p:spTree>
   </p:cSld>
   <p:clrMapOvr>
     <a:masterClrMapping/>

--- a/PPTs/DELETED.pptx
+++ b/PPTs/DELETED.pptx
@@ -5,7 +5,7 @@
     <p:sldMasterId id="2147483670" r:id="rId1"/>
   </p:sldMasterIdLst>
   <p:notesMasterIdLst>
-    <p:notesMasterId r:id="rId13"/>
+    <p:notesMasterId r:id="rId14"/>
   </p:notesMasterIdLst>
   <p:sldIdLst>
     <p:sldId id="283" r:id="rId2"/>
@@ -19,37 +19,38 @@
     <p:sldId id="346" r:id="rId10"/>
     <p:sldId id="1012" r:id="rId11"/>
     <p:sldId id="318" r:id="rId12"/>
+    <p:sldId id="1013" r:id="rId13"/>
   </p:sldIdLst>
   <p:sldSz cx="9144000" cy="5143500" type="screen16x9"/>
   <p:notesSz cx="6858000" cy="9144000"/>
   <p:embeddedFontLst>
     <p:embeddedFont>
       <p:font typeface="Quattrocento Sans" panose="020B0502050000020003" pitchFamily="34" charset="0"/>
-      <p:regular r:id="rId14"/>
-      <p:bold r:id="rId15"/>
-      <p:italic r:id="rId16"/>
-      <p:boldItalic r:id="rId17"/>
+      <p:regular r:id="rId15"/>
+      <p:bold r:id="rId16"/>
+      <p:italic r:id="rId17"/>
+      <p:boldItalic r:id="rId18"/>
     </p:embeddedFont>
     <p:embeddedFont>
       <p:font typeface="Roboto" panose="02000000000000000000" pitchFamily="2" charset="0"/>
-      <p:regular r:id="rId18"/>
-      <p:bold r:id="rId19"/>
-      <p:italic r:id="rId20"/>
-      <p:boldItalic r:id="rId21"/>
+      <p:regular r:id="rId19"/>
+      <p:bold r:id="rId20"/>
+      <p:italic r:id="rId21"/>
+      <p:boldItalic r:id="rId22"/>
     </p:embeddedFont>
     <p:embeddedFont>
       <p:font typeface="Roboto Light" panose="02000000000000000000" pitchFamily="2" charset="0"/>
-      <p:regular r:id="rId22"/>
-      <p:bold r:id="rId23"/>
-      <p:italic r:id="rId24"/>
-      <p:boldItalic r:id="rId25"/>
+      <p:regular r:id="rId23"/>
+      <p:bold r:id="rId24"/>
+      <p:italic r:id="rId25"/>
+      <p:boldItalic r:id="rId26"/>
     </p:embeddedFont>
     <p:embeddedFont>
       <p:font typeface="Roboto Medium" panose="02000000000000000000" pitchFamily="2" charset="0"/>
-      <p:regular r:id="rId26"/>
-      <p:bold r:id="rId27"/>
-      <p:italic r:id="rId28"/>
-      <p:boldItalic r:id="rId29"/>
+      <p:regular r:id="rId27"/>
+      <p:bold r:id="rId28"/>
+      <p:italic r:id="rId29"/>
+      <p:boldItalic r:id="rId30"/>
     </p:embeddedFont>
   </p:embeddedFontLst>
   <p:defaultTextStyle>
@@ -12431,7 +12432,7 @@
           <a:p>
             <a:fld id="{FB221443-D73C-634A-A910-7320408C156D}" type="datetimeFigureOut">
               <a:rPr lang="en-US" smtClean="0"/>
-              <a:t>4/16/2026</a:t>
+              <a:t>5/5/2026</a:t>
             </a:fld>
             <a:endParaRPr lang="en-US"/>
           </a:p>
@@ -20438,6 +20439,1508 @@
         </p:spPr>
       </p:cxnSp>
     </p:spTree>
+  </p:cSld>
+  <p:clrMapOvr>
+    <a:masterClrMapping/>
+  </p:clrMapOvr>
+</p:sld>
+</file>
+
+<file path=ppt/slides/slide12.xml><?xml version="1.0" encoding="utf-8"?>
+<p:sld xmlns:a="http://schemas.openxmlformats.org/drawingml/2006/main" xmlns:r="http://schemas.openxmlformats.org/officeDocument/2006/relationships" xmlns:p="http://schemas.openxmlformats.org/presentationml/2006/main">
+  <p:cSld>
+    <p:spTree>
+      <p:nvGrpSpPr>
+        <p:cNvPr id="1" name=""/>
+        <p:cNvGrpSpPr/>
+        <p:nvPr/>
+      </p:nvGrpSpPr>
+      <p:grpSpPr>
+        <a:xfrm>
+          <a:off x="0" y="0"/>
+          <a:ext cx="0" cy="0"/>
+          <a:chOff x="0" y="0"/>
+          <a:chExt cx="0" cy="0"/>
+        </a:xfrm>
+      </p:grpSpPr>
+      <p:sp>
+        <p:nvSpPr>
+          <p:cNvPr id="2" name="Title 1">
+            <a:extLst>
+              <a:ext uri="{FF2B5EF4-FFF2-40B4-BE49-F238E27FC236}">
+                <a16:creationId xmlns:a16="http://schemas.microsoft.com/office/drawing/2014/main" id="{7CA77488-96CD-D217-F71F-6046236A890D}"/>
+              </a:ext>
+            </a:extLst>
+          </p:cNvPr>
+          <p:cNvSpPr>
+            <a:spLocks noGrp="1"/>
+          </p:cNvSpPr>
+          <p:nvPr>
+            <p:ph type="title"/>
+          </p:nvPr>
+        </p:nvSpPr>
+        <p:spPr/>
+        <p:txBody>
+          <a:bodyPr/>
+          <a:lstStyle/>
+          <a:p>
+            <a:endParaRPr lang="zh-CN" altLang="en-US"/>
+          </a:p>
+        </p:txBody>
+      </p:sp>
+      <p:sp>
+        <p:nvSpPr>
+          <p:cNvPr id="4" name="Slide Number Placeholder 3">
+            <a:extLst>
+              <a:ext uri="{FF2B5EF4-FFF2-40B4-BE49-F238E27FC236}">
+                <a16:creationId xmlns:a16="http://schemas.microsoft.com/office/drawing/2014/main" id="{9E6F5DBA-521B-AF4F-2616-4BF7045317AE}"/>
+              </a:ext>
+            </a:extLst>
+          </p:cNvPr>
+          <p:cNvSpPr>
+            <a:spLocks noGrp="1"/>
+          </p:cNvSpPr>
+          <p:nvPr>
+            <p:ph type="sldNum" idx="12"/>
+          </p:nvPr>
+        </p:nvSpPr>
+        <p:spPr/>
+        <p:txBody>
+          <a:bodyPr/>
+          <a:lstStyle/>
+          <a:p>
+            <a:pPr marL="0" lvl="0" indent="0" algn="r" rtl="0">
+              <a:spcBef>
+                <a:spcPts val="0"/>
+              </a:spcBef>
+              <a:spcAft>
+                <a:spcPts val="0"/>
+              </a:spcAft>
+              <a:buNone/>
+            </a:pPr>
+            <a:fld id="{00000000-1234-1234-1234-123412341234}" type="slidenum">
+              <a:rPr lang="en" smtClean="0"/>
+              <a:t>12</a:t>
+            </a:fld>
+            <a:endParaRPr lang="en"/>
+          </a:p>
+        </p:txBody>
+      </p:sp>
+      <p:graphicFrame>
+        <p:nvGraphicFramePr>
+          <p:cNvPr id="6" name="Table 5">
+            <a:extLst>
+              <a:ext uri="{FF2B5EF4-FFF2-40B4-BE49-F238E27FC236}">
+                <a16:creationId xmlns:a16="http://schemas.microsoft.com/office/drawing/2014/main" id="{EB732A04-CEF1-77E6-6EF8-B8C881E38BF9}"/>
+              </a:ext>
+            </a:extLst>
+          </p:cNvPr>
+          <p:cNvGraphicFramePr>
+            <a:graphicFrameLocks noGrp="1"/>
+          </p:cNvGraphicFramePr>
+          <p:nvPr>
+            <p:extLst>
+              <p:ext uri="{D42A27DB-BD31-4B8C-83A1-F6EECF244321}">
+                <p14:modId xmlns:p14="http://schemas.microsoft.com/office/powerpoint/2010/main" val="1025089266"/>
+              </p:ext>
+            </p:extLst>
+          </p:nvPr>
+        </p:nvGraphicFramePr>
+        <p:xfrm>
+          <a:off x="1257994" y="2551265"/>
+          <a:ext cx="5741324" cy="370840"/>
+        </p:xfrm>
+        <a:graphic>
+          <a:graphicData uri="http://schemas.openxmlformats.org/drawingml/2006/table">
+            <a:tbl>
+              <a:tblPr firstRow="1" bandRow="1">
+                <a:tableStyleId>{5940675A-B579-460E-94D1-54222C63F5DA}</a:tableStyleId>
+              </a:tblPr>
+              <a:tblGrid>
+                <a:gridCol w="1435331">
+                  <a:extLst>
+                    <a:ext uri="{9D8B030D-6E8A-4147-A177-3AD203B41FA5}">
+                      <a16:colId xmlns:a16="http://schemas.microsoft.com/office/drawing/2014/main" val="1845969867"/>
+                    </a:ext>
+                  </a:extLst>
+                </a:gridCol>
+                <a:gridCol w="1435331">
+                  <a:extLst>
+                    <a:ext uri="{9D8B030D-6E8A-4147-A177-3AD203B41FA5}">
+                      <a16:colId xmlns:a16="http://schemas.microsoft.com/office/drawing/2014/main" val="706716614"/>
+                    </a:ext>
+                  </a:extLst>
+                </a:gridCol>
+                <a:gridCol w="1435331">
+                  <a:extLst>
+                    <a:ext uri="{9D8B030D-6E8A-4147-A177-3AD203B41FA5}">
+                      <a16:colId xmlns:a16="http://schemas.microsoft.com/office/drawing/2014/main" val="1056824272"/>
+                    </a:ext>
+                  </a:extLst>
+                </a:gridCol>
+                <a:gridCol w="1435331">
+                  <a:extLst>
+                    <a:ext uri="{9D8B030D-6E8A-4147-A177-3AD203B41FA5}">
+                      <a16:colId xmlns:a16="http://schemas.microsoft.com/office/drawing/2014/main" val="1497026187"/>
+                    </a:ext>
+                  </a:extLst>
+                </a:gridCol>
+              </a:tblGrid>
+              <a:tr h="370840">
+                <a:tc>
+                  <a:txBody>
+                    <a:bodyPr/>
+                    <a:lstStyle/>
+                    <a:p>
+                      <a:endParaRPr lang="zh-CN" altLang="en-US" sz="1600"/>
+                    </a:p>
+                  </a:txBody>
+                  <a:tcPr/>
+                </a:tc>
+                <a:tc>
+                  <a:txBody>
+                    <a:bodyPr/>
+                    <a:lstStyle/>
+                    <a:p>
+                      <a:endParaRPr lang="zh-CN" altLang="en-US" sz="1600"/>
+                    </a:p>
+                  </a:txBody>
+                  <a:tcPr/>
+                </a:tc>
+                <a:tc>
+                  <a:txBody>
+                    <a:bodyPr/>
+                    <a:lstStyle/>
+                    <a:p>
+                      <a:endParaRPr lang="zh-CN" altLang="en-US" sz="1600"/>
+                    </a:p>
+                  </a:txBody>
+                  <a:tcPr/>
+                </a:tc>
+                <a:tc>
+                  <a:txBody>
+                    <a:bodyPr/>
+                    <a:lstStyle/>
+                    <a:p>
+                      <a:endParaRPr lang="zh-CN" altLang="en-US" sz="1600" dirty="0"/>
+                    </a:p>
+                  </a:txBody>
+                  <a:tcPr/>
+                </a:tc>
+                <a:extLst>
+                  <a:ext uri="{0D108BD9-81ED-4DB2-BD59-A6C34878D82A}">
+                    <a16:rowId xmlns:a16="http://schemas.microsoft.com/office/drawing/2014/main" val="4282021193"/>
+                  </a:ext>
+                </a:extLst>
+              </a:tr>
+            </a:tbl>
+          </a:graphicData>
+        </a:graphic>
+      </p:graphicFrame>
+      <p:sp>
+        <p:nvSpPr>
+          <p:cNvPr id="7" name="TextBox 6">
+            <a:extLst>
+              <a:ext uri="{FF2B5EF4-FFF2-40B4-BE49-F238E27FC236}">
+                <a16:creationId xmlns:a16="http://schemas.microsoft.com/office/drawing/2014/main" id="{A4A8E226-ACCB-FD49-803B-23FBED778610}"/>
+              </a:ext>
+            </a:extLst>
+          </p:cNvPr>
+          <p:cNvSpPr txBox="1"/>
+          <p:nvPr/>
+        </p:nvSpPr>
+        <p:spPr>
+          <a:xfrm>
+            <a:off x="906088" y="2922105"/>
+            <a:ext cx="582211" cy="307777"/>
+          </a:xfrm>
+          <a:prstGeom prst="rect">
+            <a:avLst/>
+          </a:prstGeom>
+          <a:noFill/>
+        </p:spPr>
+        <p:txBody>
+          <a:bodyPr wrap="none" rtlCol="0">
+            <a:spAutoFit/>
+          </a:bodyPr>
+          <a:lstStyle/>
+          <a:p>
+            <a:r>
+              <a:rPr lang="en-US" altLang="zh-CN" dirty="0"/>
+              <a:t>1300</a:t>
+            </a:r>
+            <a:endParaRPr lang="zh-CN" altLang="en-US" dirty="0"/>
+          </a:p>
+        </p:txBody>
+      </p:sp>
+      <p:sp>
+        <p:nvSpPr>
+          <p:cNvPr id="8" name="TextBox 7">
+            <a:extLst>
+              <a:ext uri="{FF2B5EF4-FFF2-40B4-BE49-F238E27FC236}">
+                <a16:creationId xmlns:a16="http://schemas.microsoft.com/office/drawing/2014/main" id="{898257CA-C7B0-6D06-E8CA-80CE9E3ADE14}"/>
+              </a:ext>
+            </a:extLst>
+          </p:cNvPr>
+          <p:cNvSpPr txBox="1"/>
+          <p:nvPr/>
+        </p:nvSpPr>
+        <p:spPr>
+          <a:xfrm>
+            <a:off x="2353838" y="2930705"/>
+            <a:ext cx="582211" cy="307777"/>
+          </a:xfrm>
+          <a:prstGeom prst="rect">
+            <a:avLst/>
+          </a:prstGeom>
+          <a:noFill/>
+        </p:spPr>
+        <p:txBody>
+          <a:bodyPr wrap="none" rtlCol="0">
+            <a:spAutoFit/>
+          </a:bodyPr>
+          <a:lstStyle/>
+          <a:p>
+            <a:r>
+              <a:rPr lang="en-US" altLang="zh-CN" dirty="0"/>
+              <a:t>1400</a:t>
+            </a:r>
+            <a:endParaRPr lang="zh-CN" altLang="en-US" dirty="0"/>
+          </a:p>
+        </p:txBody>
+      </p:sp>
+      <p:sp>
+        <p:nvSpPr>
+          <p:cNvPr id="9" name="TextBox 8">
+            <a:extLst>
+              <a:ext uri="{FF2B5EF4-FFF2-40B4-BE49-F238E27FC236}">
+                <a16:creationId xmlns:a16="http://schemas.microsoft.com/office/drawing/2014/main" id="{7A47CD0F-2113-75E1-7764-34EFFDF93809}"/>
+              </a:ext>
+            </a:extLst>
+          </p:cNvPr>
+          <p:cNvSpPr txBox="1"/>
+          <p:nvPr/>
+        </p:nvSpPr>
+        <p:spPr>
+          <a:xfrm>
+            <a:off x="3801588" y="2930705"/>
+            <a:ext cx="582211" cy="307777"/>
+          </a:xfrm>
+          <a:prstGeom prst="rect">
+            <a:avLst/>
+          </a:prstGeom>
+          <a:noFill/>
+        </p:spPr>
+        <p:txBody>
+          <a:bodyPr wrap="none" rtlCol="0">
+            <a:spAutoFit/>
+          </a:bodyPr>
+          <a:lstStyle/>
+          <a:p>
+            <a:r>
+              <a:rPr lang="en-US" altLang="zh-CN" dirty="0"/>
+              <a:t>1500</a:t>
+            </a:r>
+            <a:endParaRPr lang="zh-CN" altLang="en-US" dirty="0"/>
+          </a:p>
+        </p:txBody>
+      </p:sp>
+      <p:sp>
+        <p:nvSpPr>
+          <p:cNvPr id="10" name="TextBox 9">
+            <a:extLst>
+              <a:ext uri="{FF2B5EF4-FFF2-40B4-BE49-F238E27FC236}">
+                <a16:creationId xmlns:a16="http://schemas.microsoft.com/office/drawing/2014/main" id="{E3B9D844-F9CE-C45E-0543-AF18A9682D65}"/>
+              </a:ext>
+            </a:extLst>
+          </p:cNvPr>
+          <p:cNvSpPr txBox="1"/>
+          <p:nvPr/>
+        </p:nvSpPr>
+        <p:spPr>
+          <a:xfrm>
+            <a:off x="5249338" y="2930705"/>
+            <a:ext cx="582211" cy="307777"/>
+          </a:xfrm>
+          <a:prstGeom prst="rect">
+            <a:avLst/>
+          </a:prstGeom>
+          <a:noFill/>
+        </p:spPr>
+        <p:txBody>
+          <a:bodyPr wrap="none" rtlCol="0">
+            <a:spAutoFit/>
+          </a:bodyPr>
+          <a:lstStyle/>
+          <a:p>
+            <a:r>
+              <a:rPr lang="en-US" altLang="zh-CN" dirty="0"/>
+              <a:t>1600</a:t>
+            </a:r>
+            <a:endParaRPr lang="zh-CN" altLang="en-US" dirty="0"/>
+          </a:p>
+        </p:txBody>
+      </p:sp>
+      <p:sp>
+        <p:nvSpPr>
+          <p:cNvPr id="11" name="TextBox 10">
+            <a:extLst>
+              <a:ext uri="{FF2B5EF4-FFF2-40B4-BE49-F238E27FC236}">
+                <a16:creationId xmlns:a16="http://schemas.microsoft.com/office/drawing/2014/main" id="{D67FFCE6-037E-BC2D-9B84-98E472A70156}"/>
+              </a:ext>
+            </a:extLst>
+          </p:cNvPr>
+          <p:cNvSpPr txBox="1"/>
+          <p:nvPr/>
+        </p:nvSpPr>
+        <p:spPr>
+          <a:xfrm>
+            <a:off x="6708212" y="2930705"/>
+            <a:ext cx="582211" cy="307777"/>
+          </a:xfrm>
+          <a:prstGeom prst="rect">
+            <a:avLst/>
+          </a:prstGeom>
+          <a:noFill/>
+        </p:spPr>
+        <p:txBody>
+          <a:bodyPr wrap="none" rtlCol="0">
+            <a:spAutoFit/>
+          </a:bodyPr>
+          <a:lstStyle/>
+          <a:p>
+            <a:r>
+              <a:rPr lang="en-US" altLang="zh-CN" dirty="0"/>
+              <a:t>1700</a:t>
+            </a:r>
+            <a:endParaRPr lang="zh-CN" altLang="en-US" dirty="0"/>
+          </a:p>
+        </p:txBody>
+      </p:sp>
+      <p:cxnSp>
+        <p:nvCxnSpPr>
+          <p:cNvPr id="13" name="Straight Arrow Connector 12">
+            <a:extLst>
+              <a:ext uri="{FF2B5EF4-FFF2-40B4-BE49-F238E27FC236}">
+                <a16:creationId xmlns:a16="http://schemas.microsoft.com/office/drawing/2014/main" id="{4798CF03-7BB0-DD17-562E-FC6514D4C6A3}"/>
+              </a:ext>
+            </a:extLst>
+          </p:cNvPr>
+          <p:cNvCxnSpPr/>
+          <p:nvPr/>
+        </p:nvCxnSpPr>
+        <p:spPr>
+          <a:xfrm>
+            <a:off x="1257994" y="2393015"/>
+            <a:ext cx="5741323" cy="0"/>
+          </a:xfrm>
+          <a:prstGeom prst="straightConnector1">
+            <a:avLst/>
+          </a:prstGeom>
+          <a:ln w="19050">
+            <a:headEnd type="triangle" w="med" len="med"/>
+            <a:tailEnd type="triangle" w="med" len="med"/>
+          </a:ln>
+        </p:spPr>
+        <p:style>
+          <a:lnRef idx="1">
+            <a:schemeClr val="dk1"/>
+          </a:lnRef>
+          <a:fillRef idx="0">
+            <a:schemeClr val="dk1"/>
+          </a:fillRef>
+          <a:effectRef idx="0">
+            <a:schemeClr val="dk1"/>
+          </a:effectRef>
+          <a:fontRef idx="minor">
+            <a:schemeClr val="tx1"/>
+          </a:fontRef>
+        </p:style>
+      </p:cxnSp>
+      <p:sp>
+        <p:nvSpPr>
+          <p:cNvPr id="14" name="TextBox 13">
+            <a:extLst>
+              <a:ext uri="{FF2B5EF4-FFF2-40B4-BE49-F238E27FC236}">
+                <a16:creationId xmlns:a16="http://schemas.microsoft.com/office/drawing/2014/main" id="{F4916B49-B576-56D8-7851-1BE90C3A1F38}"/>
+              </a:ext>
+            </a:extLst>
+          </p:cNvPr>
+          <p:cNvSpPr txBox="1"/>
+          <p:nvPr/>
+        </p:nvSpPr>
+        <p:spPr>
+          <a:xfrm>
+            <a:off x="2480172" y="2085238"/>
+            <a:ext cx="3659976" cy="307777"/>
+          </a:xfrm>
+          <a:prstGeom prst="rect">
+            <a:avLst/>
+          </a:prstGeom>
+          <a:noFill/>
+        </p:spPr>
+        <p:txBody>
+          <a:bodyPr wrap="none" rtlCol="0">
+            <a:spAutoFit/>
+          </a:bodyPr>
+          <a:lstStyle/>
+          <a:p>
+            <a:r>
+              <a:rPr lang="en-US" altLang="zh-CN" dirty="0"/>
+              <a:t>Send window: [1300, 1700) = [1300, 1699] </a:t>
+            </a:r>
+            <a:endParaRPr lang="zh-CN" altLang="en-US" dirty="0"/>
+          </a:p>
+        </p:txBody>
+      </p:sp>
+      <p:cxnSp>
+        <p:nvCxnSpPr>
+          <p:cNvPr id="16" name="Straight Arrow Connector 15">
+            <a:extLst>
+              <a:ext uri="{FF2B5EF4-FFF2-40B4-BE49-F238E27FC236}">
+                <a16:creationId xmlns:a16="http://schemas.microsoft.com/office/drawing/2014/main" id="{6DD3380D-44A5-5677-DF59-1A067717F060}"/>
+              </a:ext>
+            </a:extLst>
+          </p:cNvPr>
+          <p:cNvCxnSpPr>
+            <a:cxnSpLocks/>
+          </p:cNvCxnSpPr>
+          <p:nvPr/>
+        </p:nvCxnSpPr>
+        <p:spPr>
+          <a:xfrm flipV="1">
+            <a:off x="1257994" y="3158671"/>
+            <a:ext cx="0" cy="207819"/>
+          </a:xfrm>
+          <a:prstGeom prst="straightConnector1">
+            <a:avLst/>
+          </a:prstGeom>
+          <a:ln>
+            <a:tailEnd type="triangle"/>
+          </a:ln>
+        </p:spPr>
+        <p:style>
+          <a:lnRef idx="1">
+            <a:schemeClr val="dk1"/>
+          </a:lnRef>
+          <a:fillRef idx="0">
+            <a:schemeClr val="dk1"/>
+          </a:fillRef>
+          <a:effectRef idx="0">
+            <a:schemeClr val="dk1"/>
+          </a:effectRef>
+          <a:fontRef idx="minor">
+            <a:schemeClr val="tx1"/>
+          </a:fontRef>
+        </p:style>
+      </p:cxnSp>
+      <p:sp>
+        <p:nvSpPr>
+          <p:cNvPr id="18" name="TextBox 17">
+            <a:extLst>
+              <a:ext uri="{FF2B5EF4-FFF2-40B4-BE49-F238E27FC236}">
+                <a16:creationId xmlns:a16="http://schemas.microsoft.com/office/drawing/2014/main" id="{D01F7AD0-0C9A-67D9-D97C-2B70A5FFEBB0}"/>
+              </a:ext>
+            </a:extLst>
+          </p:cNvPr>
+          <p:cNvSpPr txBox="1"/>
+          <p:nvPr/>
+        </p:nvSpPr>
+        <p:spPr>
+          <a:xfrm>
+            <a:off x="425902" y="3312559"/>
+            <a:ext cx="1797287" cy="307777"/>
+          </a:xfrm>
+          <a:prstGeom prst="rect">
+            <a:avLst/>
+          </a:prstGeom>
+          <a:noFill/>
+        </p:spPr>
+        <p:txBody>
+          <a:bodyPr wrap="none" rtlCol="0">
+            <a:spAutoFit/>
+          </a:bodyPr>
+          <a:lstStyle/>
+          <a:p>
+            <a:r>
+              <a:rPr lang="en-US" altLang="zh-CN" dirty="0"/>
+              <a:t>First un-</a:t>
+            </a:r>
+            <a:r>
+              <a:rPr lang="en-US" altLang="zh-CN" dirty="0" err="1"/>
+              <a:t>ACKed</a:t>
+            </a:r>
+            <a:r>
+              <a:rPr lang="en-US" altLang="zh-CN" dirty="0"/>
+              <a:t> byte</a:t>
+            </a:r>
+            <a:endParaRPr lang="zh-CN" altLang="en-US" dirty="0"/>
+          </a:p>
+        </p:txBody>
+      </p:sp>
+      <p:graphicFrame>
+        <p:nvGraphicFramePr>
+          <p:cNvPr id="20" name="Table 19">
+            <a:extLst>
+              <a:ext uri="{FF2B5EF4-FFF2-40B4-BE49-F238E27FC236}">
+                <a16:creationId xmlns:a16="http://schemas.microsoft.com/office/drawing/2014/main" id="{6B909170-C797-AED7-0659-14E03FE9C14F}"/>
+              </a:ext>
+            </a:extLst>
+          </p:cNvPr>
+          <p:cNvGraphicFramePr>
+            <a:graphicFrameLocks noGrp="1"/>
+          </p:cNvGraphicFramePr>
+          <p:nvPr>
+            <p:extLst>
+              <p:ext uri="{D42A27DB-BD31-4B8C-83A1-F6EECF244321}">
+                <p14:modId xmlns:p14="http://schemas.microsoft.com/office/powerpoint/2010/main" val="3658864616"/>
+              </p:ext>
+            </p:extLst>
+          </p:nvPr>
+        </p:nvGraphicFramePr>
+        <p:xfrm>
+          <a:off x="1257994" y="3972267"/>
+          <a:ext cx="7106395" cy="370840"/>
+        </p:xfrm>
+        <a:graphic>
+          <a:graphicData uri="http://schemas.openxmlformats.org/drawingml/2006/table">
+            <a:tbl>
+              <a:tblPr firstRow="1" bandRow="1">
+                <a:tableStyleId>{5940675A-B579-460E-94D1-54222C63F5DA}</a:tableStyleId>
+              </a:tblPr>
+              <a:tblGrid>
+                <a:gridCol w="1421279">
+                  <a:extLst>
+                    <a:ext uri="{9D8B030D-6E8A-4147-A177-3AD203B41FA5}">
+                      <a16:colId xmlns:a16="http://schemas.microsoft.com/office/drawing/2014/main" val="1845969867"/>
+                    </a:ext>
+                  </a:extLst>
+                </a:gridCol>
+                <a:gridCol w="1421279">
+                  <a:extLst>
+                    <a:ext uri="{9D8B030D-6E8A-4147-A177-3AD203B41FA5}">
+                      <a16:colId xmlns:a16="http://schemas.microsoft.com/office/drawing/2014/main" val="706716614"/>
+                    </a:ext>
+                  </a:extLst>
+                </a:gridCol>
+                <a:gridCol w="1421279">
+                  <a:extLst>
+                    <a:ext uri="{9D8B030D-6E8A-4147-A177-3AD203B41FA5}">
+                      <a16:colId xmlns:a16="http://schemas.microsoft.com/office/drawing/2014/main" val="1056824272"/>
+                    </a:ext>
+                  </a:extLst>
+                </a:gridCol>
+                <a:gridCol w="1421279">
+                  <a:extLst>
+                    <a:ext uri="{9D8B030D-6E8A-4147-A177-3AD203B41FA5}">
+                      <a16:colId xmlns:a16="http://schemas.microsoft.com/office/drawing/2014/main" val="1497026187"/>
+                    </a:ext>
+                  </a:extLst>
+                </a:gridCol>
+                <a:gridCol w="1421279">
+                  <a:extLst>
+                    <a:ext uri="{9D8B030D-6E8A-4147-A177-3AD203B41FA5}">
+                      <a16:colId xmlns:a16="http://schemas.microsoft.com/office/drawing/2014/main" val="1648088277"/>
+                    </a:ext>
+                  </a:extLst>
+                </a:gridCol>
+              </a:tblGrid>
+              <a:tr h="370840">
+                <a:tc>
+                  <a:txBody>
+                    <a:bodyPr/>
+                    <a:lstStyle/>
+                    <a:p>
+                      <a:endParaRPr lang="zh-CN" altLang="en-US" sz="1600"/>
+                    </a:p>
+                  </a:txBody>
+                  <a:tcPr/>
+                </a:tc>
+                <a:tc>
+                  <a:txBody>
+                    <a:bodyPr/>
+                    <a:lstStyle/>
+                    <a:p>
+                      <a:endParaRPr lang="zh-CN" altLang="en-US" sz="1600"/>
+                    </a:p>
+                  </a:txBody>
+                  <a:tcPr/>
+                </a:tc>
+                <a:tc>
+                  <a:txBody>
+                    <a:bodyPr/>
+                    <a:lstStyle/>
+                    <a:p>
+                      <a:endParaRPr lang="zh-CN" altLang="en-US" sz="1600"/>
+                    </a:p>
+                  </a:txBody>
+                  <a:tcPr/>
+                </a:tc>
+                <a:tc>
+                  <a:txBody>
+                    <a:bodyPr/>
+                    <a:lstStyle/>
+                    <a:p>
+                      <a:endParaRPr lang="zh-CN" altLang="en-US" sz="1600" dirty="0"/>
+                    </a:p>
+                  </a:txBody>
+                  <a:tcPr/>
+                </a:tc>
+                <a:tc>
+                  <a:txBody>
+                    <a:bodyPr/>
+                    <a:lstStyle/>
+                    <a:p>
+                      <a:endParaRPr lang="zh-CN" altLang="en-US" sz="1600" dirty="0"/>
+                    </a:p>
+                  </a:txBody>
+                  <a:tcPr/>
+                </a:tc>
+                <a:extLst>
+                  <a:ext uri="{0D108BD9-81ED-4DB2-BD59-A6C34878D82A}">
+                    <a16:rowId xmlns:a16="http://schemas.microsoft.com/office/drawing/2014/main" val="4282021193"/>
+                  </a:ext>
+                </a:extLst>
+              </a:tr>
+            </a:tbl>
+          </a:graphicData>
+        </a:graphic>
+      </p:graphicFrame>
+      <p:sp>
+        <p:nvSpPr>
+          <p:cNvPr id="21" name="TextBox 20">
+            <a:extLst>
+              <a:ext uri="{FF2B5EF4-FFF2-40B4-BE49-F238E27FC236}">
+                <a16:creationId xmlns:a16="http://schemas.microsoft.com/office/drawing/2014/main" id="{5C3754BE-65A0-AFBC-77C7-B97DDD532E08}"/>
+              </a:ext>
+            </a:extLst>
+          </p:cNvPr>
+          <p:cNvSpPr txBox="1"/>
+          <p:nvPr/>
+        </p:nvSpPr>
+        <p:spPr>
+          <a:xfrm>
+            <a:off x="906088" y="4343107"/>
+            <a:ext cx="582211" cy="307777"/>
+          </a:xfrm>
+          <a:prstGeom prst="rect">
+            <a:avLst/>
+          </a:prstGeom>
+          <a:noFill/>
+        </p:spPr>
+        <p:txBody>
+          <a:bodyPr wrap="none" rtlCol="0">
+            <a:spAutoFit/>
+          </a:bodyPr>
+          <a:lstStyle/>
+          <a:p>
+            <a:r>
+              <a:rPr lang="en-US" altLang="zh-CN" dirty="0"/>
+              <a:t>1300</a:t>
+            </a:r>
+            <a:endParaRPr lang="zh-CN" altLang="en-US" dirty="0"/>
+          </a:p>
+        </p:txBody>
+      </p:sp>
+      <p:sp>
+        <p:nvSpPr>
+          <p:cNvPr id="22" name="TextBox 21">
+            <a:extLst>
+              <a:ext uri="{FF2B5EF4-FFF2-40B4-BE49-F238E27FC236}">
+                <a16:creationId xmlns:a16="http://schemas.microsoft.com/office/drawing/2014/main" id="{4D8ED6DB-1513-B0FC-8B29-09814604BAAA}"/>
+              </a:ext>
+            </a:extLst>
+          </p:cNvPr>
+          <p:cNvSpPr txBox="1"/>
+          <p:nvPr/>
+        </p:nvSpPr>
+        <p:spPr>
+          <a:xfrm>
+            <a:off x="2353838" y="4351707"/>
+            <a:ext cx="582211" cy="307777"/>
+          </a:xfrm>
+          <a:prstGeom prst="rect">
+            <a:avLst/>
+          </a:prstGeom>
+          <a:noFill/>
+        </p:spPr>
+        <p:txBody>
+          <a:bodyPr wrap="none" rtlCol="0">
+            <a:spAutoFit/>
+          </a:bodyPr>
+          <a:lstStyle/>
+          <a:p>
+            <a:r>
+              <a:rPr lang="en-US" altLang="zh-CN" dirty="0"/>
+              <a:t>1400</a:t>
+            </a:r>
+            <a:endParaRPr lang="zh-CN" altLang="en-US" dirty="0"/>
+          </a:p>
+        </p:txBody>
+      </p:sp>
+      <p:sp>
+        <p:nvSpPr>
+          <p:cNvPr id="23" name="TextBox 22">
+            <a:extLst>
+              <a:ext uri="{FF2B5EF4-FFF2-40B4-BE49-F238E27FC236}">
+                <a16:creationId xmlns:a16="http://schemas.microsoft.com/office/drawing/2014/main" id="{555617A5-0945-258D-82C4-8A05D8DF8503}"/>
+              </a:ext>
+            </a:extLst>
+          </p:cNvPr>
+          <p:cNvSpPr txBox="1"/>
+          <p:nvPr/>
+        </p:nvSpPr>
+        <p:spPr>
+          <a:xfrm>
+            <a:off x="3801588" y="4351707"/>
+            <a:ext cx="582211" cy="307777"/>
+          </a:xfrm>
+          <a:prstGeom prst="rect">
+            <a:avLst/>
+          </a:prstGeom>
+          <a:noFill/>
+        </p:spPr>
+        <p:txBody>
+          <a:bodyPr wrap="none" rtlCol="0">
+            <a:spAutoFit/>
+          </a:bodyPr>
+          <a:lstStyle/>
+          <a:p>
+            <a:r>
+              <a:rPr lang="en-US" altLang="zh-CN" dirty="0"/>
+              <a:t>1500</a:t>
+            </a:r>
+            <a:endParaRPr lang="zh-CN" altLang="en-US" dirty="0"/>
+          </a:p>
+        </p:txBody>
+      </p:sp>
+      <p:sp>
+        <p:nvSpPr>
+          <p:cNvPr id="24" name="TextBox 23">
+            <a:extLst>
+              <a:ext uri="{FF2B5EF4-FFF2-40B4-BE49-F238E27FC236}">
+                <a16:creationId xmlns:a16="http://schemas.microsoft.com/office/drawing/2014/main" id="{A7CA2F44-D9BC-38B9-28B1-E29A530EDCD4}"/>
+              </a:ext>
+            </a:extLst>
+          </p:cNvPr>
+          <p:cNvSpPr txBox="1"/>
+          <p:nvPr/>
+        </p:nvSpPr>
+        <p:spPr>
+          <a:xfrm>
+            <a:off x="5249338" y="4351707"/>
+            <a:ext cx="582211" cy="307777"/>
+          </a:xfrm>
+          <a:prstGeom prst="rect">
+            <a:avLst/>
+          </a:prstGeom>
+          <a:noFill/>
+        </p:spPr>
+        <p:txBody>
+          <a:bodyPr wrap="none" rtlCol="0">
+            <a:spAutoFit/>
+          </a:bodyPr>
+          <a:lstStyle/>
+          <a:p>
+            <a:r>
+              <a:rPr lang="en-US" altLang="zh-CN" dirty="0"/>
+              <a:t>1600</a:t>
+            </a:r>
+            <a:endParaRPr lang="zh-CN" altLang="en-US" dirty="0"/>
+          </a:p>
+        </p:txBody>
+      </p:sp>
+      <p:sp>
+        <p:nvSpPr>
+          <p:cNvPr id="25" name="TextBox 24">
+            <a:extLst>
+              <a:ext uri="{FF2B5EF4-FFF2-40B4-BE49-F238E27FC236}">
+                <a16:creationId xmlns:a16="http://schemas.microsoft.com/office/drawing/2014/main" id="{E6632004-B2C5-B47D-529B-9CA7905E9CB2}"/>
+              </a:ext>
+            </a:extLst>
+          </p:cNvPr>
+          <p:cNvSpPr txBox="1"/>
+          <p:nvPr/>
+        </p:nvSpPr>
+        <p:spPr>
+          <a:xfrm>
+            <a:off x="6708212" y="4351707"/>
+            <a:ext cx="582211" cy="307777"/>
+          </a:xfrm>
+          <a:prstGeom prst="rect">
+            <a:avLst/>
+          </a:prstGeom>
+          <a:noFill/>
+        </p:spPr>
+        <p:txBody>
+          <a:bodyPr wrap="none" rtlCol="0">
+            <a:spAutoFit/>
+          </a:bodyPr>
+          <a:lstStyle/>
+          <a:p>
+            <a:r>
+              <a:rPr lang="en-US" altLang="zh-CN" dirty="0"/>
+              <a:t>1700</a:t>
+            </a:r>
+            <a:endParaRPr lang="zh-CN" altLang="en-US" dirty="0"/>
+          </a:p>
+        </p:txBody>
+      </p:sp>
+      <p:cxnSp>
+        <p:nvCxnSpPr>
+          <p:cNvPr id="26" name="Straight Arrow Connector 25">
+            <a:extLst>
+              <a:ext uri="{FF2B5EF4-FFF2-40B4-BE49-F238E27FC236}">
+                <a16:creationId xmlns:a16="http://schemas.microsoft.com/office/drawing/2014/main" id="{DA5A2CC5-0B1F-9912-D69F-1410735726FA}"/>
+              </a:ext>
+            </a:extLst>
+          </p:cNvPr>
+          <p:cNvCxnSpPr/>
+          <p:nvPr/>
+        </p:nvCxnSpPr>
+        <p:spPr>
+          <a:xfrm>
+            <a:off x="2623065" y="3848250"/>
+            <a:ext cx="5741323" cy="0"/>
+          </a:xfrm>
+          <a:prstGeom prst="straightConnector1">
+            <a:avLst/>
+          </a:prstGeom>
+          <a:ln w="19050">
+            <a:headEnd type="triangle" w="med" len="med"/>
+            <a:tailEnd type="triangle" w="med" len="med"/>
+          </a:ln>
+        </p:spPr>
+        <p:style>
+          <a:lnRef idx="1">
+            <a:schemeClr val="dk1"/>
+          </a:lnRef>
+          <a:fillRef idx="0">
+            <a:schemeClr val="dk1"/>
+          </a:fillRef>
+          <a:effectRef idx="0">
+            <a:schemeClr val="dk1"/>
+          </a:effectRef>
+          <a:fontRef idx="minor">
+            <a:schemeClr val="tx1"/>
+          </a:fontRef>
+        </p:style>
+      </p:cxnSp>
+      <p:sp>
+        <p:nvSpPr>
+          <p:cNvPr id="27" name="TextBox 26">
+            <a:extLst>
+              <a:ext uri="{FF2B5EF4-FFF2-40B4-BE49-F238E27FC236}">
+                <a16:creationId xmlns:a16="http://schemas.microsoft.com/office/drawing/2014/main" id="{9A8A9FBC-2078-6EA3-C3F8-29D9533731AE}"/>
+              </a:ext>
+            </a:extLst>
+          </p:cNvPr>
+          <p:cNvSpPr txBox="1"/>
+          <p:nvPr/>
+        </p:nvSpPr>
+        <p:spPr>
+          <a:xfrm>
+            <a:off x="4583290" y="3546416"/>
+            <a:ext cx="2353529" cy="307777"/>
+          </a:xfrm>
+          <a:prstGeom prst="rect">
+            <a:avLst/>
+          </a:prstGeom>
+          <a:noFill/>
+        </p:spPr>
+        <p:txBody>
+          <a:bodyPr wrap="none" rtlCol="0">
+            <a:spAutoFit/>
+          </a:bodyPr>
+          <a:lstStyle/>
+          <a:p>
+            <a:r>
+              <a:rPr lang="en-US" altLang="zh-CN" dirty="0"/>
+              <a:t>Send window: [1400, 1800)</a:t>
+            </a:r>
+            <a:endParaRPr lang="zh-CN" altLang="en-US" dirty="0"/>
+          </a:p>
+        </p:txBody>
+      </p:sp>
+      <p:cxnSp>
+        <p:nvCxnSpPr>
+          <p:cNvPr id="28" name="Straight Arrow Connector 27">
+            <a:extLst>
+              <a:ext uri="{FF2B5EF4-FFF2-40B4-BE49-F238E27FC236}">
+                <a16:creationId xmlns:a16="http://schemas.microsoft.com/office/drawing/2014/main" id="{E60EE925-5E12-F004-1D72-0BCD7A24D8F4}"/>
+              </a:ext>
+            </a:extLst>
+          </p:cNvPr>
+          <p:cNvCxnSpPr>
+            <a:cxnSpLocks/>
+          </p:cNvCxnSpPr>
+          <p:nvPr/>
+        </p:nvCxnSpPr>
+        <p:spPr>
+          <a:xfrm flipV="1">
+            <a:off x="2671157" y="4595152"/>
+            <a:ext cx="0" cy="207819"/>
+          </a:xfrm>
+          <a:prstGeom prst="straightConnector1">
+            <a:avLst/>
+          </a:prstGeom>
+          <a:ln>
+            <a:tailEnd type="triangle"/>
+          </a:ln>
+        </p:spPr>
+        <p:style>
+          <a:lnRef idx="1">
+            <a:schemeClr val="dk1"/>
+          </a:lnRef>
+          <a:fillRef idx="0">
+            <a:schemeClr val="dk1"/>
+          </a:fillRef>
+          <a:effectRef idx="0">
+            <a:schemeClr val="dk1"/>
+          </a:effectRef>
+          <a:fontRef idx="minor">
+            <a:schemeClr val="tx1"/>
+          </a:fontRef>
+        </p:style>
+      </p:cxnSp>
+      <p:sp>
+        <p:nvSpPr>
+          <p:cNvPr id="29" name="TextBox 28">
+            <a:extLst>
+              <a:ext uri="{FF2B5EF4-FFF2-40B4-BE49-F238E27FC236}">
+                <a16:creationId xmlns:a16="http://schemas.microsoft.com/office/drawing/2014/main" id="{97A1F7EF-AE9F-F7E6-BE66-B6BEB8CB7320}"/>
+              </a:ext>
+            </a:extLst>
+          </p:cNvPr>
+          <p:cNvSpPr txBox="1"/>
+          <p:nvPr/>
+        </p:nvSpPr>
+        <p:spPr>
+          <a:xfrm>
+            <a:off x="1839065" y="4749040"/>
+            <a:ext cx="1797287" cy="307777"/>
+          </a:xfrm>
+          <a:prstGeom prst="rect">
+            <a:avLst/>
+          </a:prstGeom>
+          <a:noFill/>
+        </p:spPr>
+        <p:txBody>
+          <a:bodyPr wrap="none" rtlCol="0">
+            <a:spAutoFit/>
+          </a:bodyPr>
+          <a:lstStyle/>
+          <a:p>
+            <a:r>
+              <a:rPr lang="en-US" altLang="zh-CN" dirty="0"/>
+              <a:t>First un-</a:t>
+            </a:r>
+            <a:r>
+              <a:rPr lang="en-US" altLang="zh-CN" dirty="0" err="1"/>
+              <a:t>ACKed</a:t>
+            </a:r>
+            <a:r>
+              <a:rPr lang="en-US" altLang="zh-CN" dirty="0"/>
+              <a:t> byte</a:t>
+            </a:r>
+            <a:endParaRPr lang="zh-CN" altLang="en-US" dirty="0"/>
+          </a:p>
+        </p:txBody>
+      </p:sp>
+      <p:sp>
+        <p:nvSpPr>
+          <p:cNvPr id="30" name="TextBox 29">
+            <a:extLst>
+              <a:ext uri="{FF2B5EF4-FFF2-40B4-BE49-F238E27FC236}">
+                <a16:creationId xmlns:a16="http://schemas.microsoft.com/office/drawing/2014/main" id="{CF8E043A-EA20-A315-A424-77145AADCE06}"/>
+              </a:ext>
+            </a:extLst>
+          </p:cNvPr>
+          <p:cNvSpPr txBox="1"/>
+          <p:nvPr/>
+        </p:nvSpPr>
+        <p:spPr>
+          <a:xfrm>
+            <a:off x="8115778" y="4343107"/>
+            <a:ext cx="582211" cy="307777"/>
+          </a:xfrm>
+          <a:prstGeom prst="rect">
+            <a:avLst/>
+          </a:prstGeom>
+          <a:noFill/>
+        </p:spPr>
+        <p:txBody>
+          <a:bodyPr wrap="none" rtlCol="0">
+            <a:spAutoFit/>
+          </a:bodyPr>
+          <a:lstStyle/>
+          <a:p>
+            <a:r>
+              <a:rPr lang="en-US" altLang="zh-CN" dirty="0"/>
+              <a:t>1800</a:t>
+            </a:r>
+            <a:endParaRPr lang="zh-CN" altLang="en-US" dirty="0"/>
+          </a:p>
+        </p:txBody>
+      </p:sp>
+      <p:graphicFrame>
+        <p:nvGraphicFramePr>
+          <p:cNvPr id="31" name="Table 30">
+            <a:extLst>
+              <a:ext uri="{FF2B5EF4-FFF2-40B4-BE49-F238E27FC236}">
+                <a16:creationId xmlns:a16="http://schemas.microsoft.com/office/drawing/2014/main" id="{343D91D4-4695-4881-913D-75EC816B60F3}"/>
+              </a:ext>
+            </a:extLst>
+          </p:cNvPr>
+          <p:cNvGraphicFramePr>
+            <a:graphicFrameLocks noGrp="1"/>
+          </p:cNvGraphicFramePr>
+          <p:nvPr>
+            <p:extLst>
+              <p:ext uri="{D42A27DB-BD31-4B8C-83A1-F6EECF244321}">
+                <p14:modId xmlns:p14="http://schemas.microsoft.com/office/powerpoint/2010/main" val="1025089266"/>
+              </p:ext>
+            </p:extLst>
+          </p:nvPr>
+        </p:nvGraphicFramePr>
+        <p:xfrm>
+          <a:off x="1257994" y="844150"/>
+          <a:ext cx="5741324" cy="370840"/>
+        </p:xfrm>
+        <a:graphic>
+          <a:graphicData uri="http://schemas.openxmlformats.org/drawingml/2006/table">
+            <a:tbl>
+              <a:tblPr firstRow="1" bandRow="1">
+                <a:tableStyleId>{5940675A-B579-460E-94D1-54222C63F5DA}</a:tableStyleId>
+              </a:tblPr>
+              <a:tblGrid>
+                <a:gridCol w="1435331">
+                  <a:extLst>
+                    <a:ext uri="{9D8B030D-6E8A-4147-A177-3AD203B41FA5}">
+                      <a16:colId xmlns:a16="http://schemas.microsoft.com/office/drawing/2014/main" val="1845969867"/>
+                    </a:ext>
+                  </a:extLst>
+                </a:gridCol>
+                <a:gridCol w="1435331">
+                  <a:extLst>
+                    <a:ext uri="{9D8B030D-6E8A-4147-A177-3AD203B41FA5}">
+                      <a16:colId xmlns:a16="http://schemas.microsoft.com/office/drawing/2014/main" val="706716614"/>
+                    </a:ext>
+                  </a:extLst>
+                </a:gridCol>
+                <a:gridCol w="1435331">
+                  <a:extLst>
+                    <a:ext uri="{9D8B030D-6E8A-4147-A177-3AD203B41FA5}">
+                      <a16:colId xmlns:a16="http://schemas.microsoft.com/office/drawing/2014/main" val="1056824272"/>
+                    </a:ext>
+                  </a:extLst>
+                </a:gridCol>
+                <a:gridCol w="1435331">
+                  <a:extLst>
+                    <a:ext uri="{9D8B030D-6E8A-4147-A177-3AD203B41FA5}">
+                      <a16:colId xmlns:a16="http://schemas.microsoft.com/office/drawing/2014/main" val="1497026187"/>
+                    </a:ext>
+                  </a:extLst>
+                </a:gridCol>
+              </a:tblGrid>
+              <a:tr h="370840">
+                <a:tc>
+                  <a:txBody>
+                    <a:bodyPr/>
+                    <a:lstStyle/>
+                    <a:p>
+                      <a:endParaRPr lang="zh-CN" altLang="en-US" sz="1600"/>
+                    </a:p>
+                  </a:txBody>
+                  <a:tcPr/>
+                </a:tc>
+                <a:tc>
+                  <a:txBody>
+                    <a:bodyPr/>
+                    <a:lstStyle/>
+                    <a:p>
+                      <a:endParaRPr lang="zh-CN" altLang="en-US" sz="1600"/>
+                    </a:p>
+                  </a:txBody>
+                  <a:tcPr/>
+                </a:tc>
+                <a:tc>
+                  <a:txBody>
+                    <a:bodyPr/>
+                    <a:lstStyle/>
+                    <a:p>
+                      <a:endParaRPr lang="zh-CN" altLang="en-US" sz="1600"/>
+                    </a:p>
+                  </a:txBody>
+                  <a:tcPr/>
+                </a:tc>
+                <a:tc>
+                  <a:txBody>
+                    <a:bodyPr/>
+                    <a:lstStyle/>
+                    <a:p>
+                      <a:endParaRPr lang="zh-CN" altLang="en-US" sz="1600" dirty="0"/>
+                    </a:p>
+                  </a:txBody>
+                  <a:tcPr/>
+                </a:tc>
+                <a:extLst>
+                  <a:ext uri="{0D108BD9-81ED-4DB2-BD59-A6C34878D82A}">
+                    <a16:rowId xmlns:a16="http://schemas.microsoft.com/office/drawing/2014/main" val="4282021193"/>
+                  </a:ext>
+                </a:extLst>
+              </a:tr>
+            </a:tbl>
+          </a:graphicData>
+        </a:graphic>
+      </p:graphicFrame>
+      <p:sp>
+        <p:nvSpPr>
+          <p:cNvPr id="32" name="TextBox 31">
+            <a:extLst>
+              <a:ext uri="{FF2B5EF4-FFF2-40B4-BE49-F238E27FC236}">
+                <a16:creationId xmlns:a16="http://schemas.microsoft.com/office/drawing/2014/main" id="{5D72664C-0026-19D2-179D-812023A04136}"/>
+              </a:ext>
+            </a:extLst>
+          </p:cNvPr>
+          <p:cNvSpPr txBox="1"/>
+          <p:nvPr/>
+        </p:nvSpPr>
+        <p:spPr>
+          <a:xfrm>
+            <a:off x="906088" y="1214990"/>
+            <a:ext cx="582211" cy="307777"/>
+          </a:xfrm>
+          <a:prstGeom prst="rect">
+            <a:avLst/>
+          </a:prstGeom>
+          <a:noFill/>
+        </p:spPr>
+        <p:txBody>
+          <a:bodyPr wrap="none" rtlCol="0">
+            <a:spAutoFit/>
+          </a:bodyPr>
+          <a:lstStyle/>
+          <a:p>
+            <a:r>
+              <a:rPr lang="en-US" altLang="zh-CN" dirty="0"/>
+              <a:t>1000</a:t>
+            </a:r>
+            <a:endParaRPr lang="zh-CN" altLang="en-US" dirty="0"/>
+          </a:p>
+        </p:txBody>
+      </p:sp>
+      <p:sp>
+        <p:nvSpPr>
+          <p:cNvPr id="33" name="TextBox 32">
+            <a:extLst>
+              <a:ext uri="{FF2B5EF4-FFF2-40B4-BE49-F238E27FC236}">
+                <a16:creationId xmlns:a16="http://schemas.microsoft.com/office/drawing/2014/main" id="{2F30816E-7305-A589-F264-FA281C3E2837}"/>
+              </a:ext>
+            </a:extLst>
+          </p:cNvPr>
+          <p:cNvSpPr txBox="1"/>
+          <p:nvPr/>
+        </p:nvSpPr>
+        <p:spPr>
+          <a:xfrm>
+            <a:off x="2353838" y="1223590"/>
+            <a:ext cx="582211" cy="307777"/>
+          </a:xfrm>
+          <a:prstGeom prst="rect">
+            <a:avLst/>
+          </a:prstGeom>
+          <a:noFill/>
+        </p:spPr>
+        <p:txBody>
+          <a:bodyPr wrap="none" rtlCol="0">
+            <a:spAutoFit/>
+          </a:bodyPr>
+          <a:lstStyle/>
+          <a:p>
+            <a:r>
+              <a:rPr lang="en-US" altLang="zh-CN" dirty="0"/>
+              <a:t>1400</a:t>
+            </a:r>
+            <a:endParaRPr lang="zh-CN" altLang="en-US" dirty="0"/>
+          </a:p>
+        </p:txBody>
+      </p:sp>
+      <p:sp>
+        <p:nvSpPr>
+          <p:cNvPr id="34" name="TextBox 33">
+            <a:extLst>
+              <a:ext uri="{FF2B5EF4-FFF2-40B4-BE49-F238E27FC236}">
+                <a16:creationId xmlns:a16="http://schemas.microsoft.com/office/drawing/2014/main" id="{359B44BE-6B8C-FFFC-7BF0-CE942B826FA0}"/>
+              </a:ext>
+            </a:extLst>
+          </p:cNvPr>
+          <p:cNvSpPr txBox="1"/>
+          <p:nvPr/>
+        </p:nvSpPr>
+        <p:spPr>
+          <a:xfrm>
+            <a:off x="3801588" y="1223590"/>
+            <a:ext cx="582211" cy="307777"/>
+          </a:xfrm>
+          <a:prstGeom prst="rect">
+            <a:avLst/>
+          </a:prstGeom>
+          <a:noFill/>
+        </p:spPr>
+        <p:txBody>
+          <a:bodyPr wrap="none" rtlCol="0">
+            <a:spAutoFit/>
+          </a:bodyPr>
+          <a:lstStyle/>
+          <a:p>
+            <a:r>
+              <a:rPr lang="en-US" altLang="zh-CN" dirty="0"/>
+              <a:t>1500</a:t>
+            </a:r>
+            <a:endParaRPr lang="zh-CN" altLang="en-US" dirty="0"/>
+          </a:p>
+        </p:txBody>
+      </p:sp>
+      <p:sp>
+        <p:nvSpPr>
+          <p:cNvPr id="35" name="TextBox 34">
+            <a:extLst>
+              <a:ext uri="{FF2B5EF4-FFF2-40B4-BE49-F238E27FC236}">
+                <a16:creationId xmlns:a16="http://schemas.microsoft.com/office/drawing/2014/main" id="{98E2EA1B-64F7-51B7-DF1F-359E7A107175}"/>
+              </a:ext>
+            </a:extLst>
+          </p:cNvPr>
+          <p:cNvSpPr txBox="1"/>
+          <p:nvPr/>
+        </p:nvSpPr>
+        <p:spPr>
+          <a:xfrm>
+            <a:off x="5249338" y="1223590"/>
+            <a:ext cx="582211" cy="307777"/>
+          </a:xfrm>
+          <a:prstGeom prst="rect">
+            <a:avLst/>
+          </a:prstGeom>
+          <a:noFill/>
+        </p:spPr>
+        <p:txBody>
+          <a:bodyPr wrap="none" rtlCol="0">
+            <a:spAutoFit/>
+          </a:bodyPr>
+          <a:lstStyle/>
+          <a:p>
+            <a:r>
+              <a:rPr lang="en-US" altLang="zh-CN" dirty="0"/>
+              <a:t>1600</a:t>
+            </a:r>
+            <a:endParaRPr lang="zh-CN" altLang="en-US" dirty="0"/>
+          </a:p>
+        </p:txBody>
+      </p:sp>
+      <p:sp>
+        <p:nvSpPr>
+          <p:cNvPr id="36" name="TextBox 35">
+            <a:extLst>
+              <a:ext uri="{FF2B5EF4-FFF2-40B4-BE49-F238E27FC236}">
+                <a16:creationId xmlns:a16="http://schemas.microsoft.com/office/drawing/2014/main" id="{6214B306-0D80-2CAA-3A84-F577E318C886}"/>
+              </a:ext>
+            </a:extLst>
+          </p:cNvPr>
+          <p:cNvSpPr txBox="1"/>
+          <p:nvPr/>
+        </p:nvSpPr>
+        <p:spPr>
+          <a:xfrm>
+            <a:off x="6708212" y="1223590"/>
+            <a:ext cx="582211" cy="307777"/>
+          </a:xfrm>
+          <a:prstGeom prst="rect">
+            <a:avLst/>
+          </a:prstGeom>
+          <a:noFill/>
+        </p:spPr>
+        <p:txBody>
+          <a:bodyPr wrap="none" rtlCol="0">
+            <a:spAutoFit/>
+          </a:bodyPr>
+          <a:lstStyle/>
+          <a:p>
+            <a:r>
+              <a:rPr lang="en-US" altLang="zh-CN" dirty="0"/>
+              <a:t>1400</a:t>
+            </a:r>
+            <a:endParaRPr lang="zh-CN" altLang="en-US" dirty="0"/>
+          </a:p>
+        </p:txBody>
+      </p:sp>
+      <p:cxnSp>
+        <p:nvCxnSpPr>
+          <p:cNvPr id="37" name="Straight Arrow Connector 36">
+            <a:extLst>
+              <a:ext uri="{FF2B5EF4-FFF2-40B4-BE49-F238E27FC236}">
+                <a16:creationId xmlns:a16="http://schemas.microsoft.com/office/drawing/2014/main" id="{38A7477B-5AC3-477C-0AC1-E1066C286F86}"/>
+              </a:ext>
+            </a:extLst>
+          </p:cNvPr>
+          <p:cNvCxnSpPr/>
+          <p:nvPr/>
+        </p:nvCxnSpPr>
+        <p:spPr>
+          <a:xfrm>
+            <a:off x="1257994" y="685900"/>
+            <a:ext cx="5741323" cy="0"/>
+          </a:xfrm>
+          <a:prstGeom prst="straightConnector1">
+            <a:avLst/>
+          </a:prstGeom>
+          <a:ln w="19050">
+            <a:headEnd type="triangle" w="med" len="med"/>
+            <a:tailEnd type="triangle" w="med" len="med"/>
+          </a:ln>
+        </p:spPr>
+        <p:style>
+          <a:lnRef idx="1">
+            <a:schemeClr val="dk1"/>
+          </a:lnRef>
+          <a:fillRef idx="0">
+            <a:schemeClr val="dk1"/>
+          </a:fillRef>
+          <a:effectRef idx="0">
+            <a:schemeClr val="dk1"/>
+          </a:effectRef>
+          <a:fontRef idx="minor">
+            <a:schemeClr val="tx1"/>
+          </a:fontRef>
+        </p:style>
+      </p:cxnSp>
+      <p:sp>
+        <p:nvSpPr>
+          <p:cNvPr id="38" name="TextBox 37">
+            <a:extLst>
+              <a:ext uri="{FF2B5EF4-FFF2-40B4-BE49-F238E27FC236}">
+                <a16:creationId xmlns:a16="http://schemas.microsoft.com/office/drawing/2014/main" id="{839B7AA4-BB0A-1E41-EA2B-4972A355BAD0}"/>
+              </a:ext>
+            </a:extLst>
+          </p:cNvPr>
+          <p:cNvSpPr txBox="1"/>
+          <p:nvPr/>
+        </p:nvSpPr>
+        <p:spPr>
+          <a:xfrm>
+            <a:off x="3040810" y="385378"/>
+            <a:ext cx="2403222" cy="307777"/>
+          </a:xfrm>
+          <a:prstGeom prst="rect">
+            <a:avLst/>
+          </a:prstGeom>
+          <a:noFill/>
+        </p:spPr>
+        <p:txBody>
+          <a:bodyPr wrap="none" rtlCol="0">
+            <a:spAutoFit/>
+          </a:bodyPr>
+          <a:lstStyle/>
+          <a:p>
+            <a:r>
+              <a:rPr lang="en-US" altLang="zh-CN" dirty="0"/>
+              <a:t>Send window: [1000, 1400) </a:t>
+            </a:r>
+            <a:endParaRPr lang="zh-CN" altLang="en-US" dirty="0"/>
+          </a:p>
+        </p:txBody>
+      </p:sp>
+      <p:cxnSp>
+        <p:nvCxnSpPr>
+          <p:cNvPr id="39" name="Straight Arrow Connector 38">
+            <a:extLst>
+              <a:ext uri="{FF2B5EF4-FFF2-40B4-BE49-F238E27FC236}">
+                <a16:creationId xmlns:a16="http://schemas.microsoft.com/office/drawing/2014/main" id="{3C44E8B0-4F97-E835-BDAC-CFB54B3BF47D}"/>
+              </a:ext>
+            </a:extLst>
+          </p:cNvPr>
+          <p:cNvCxnSpPr>
+            <a:cxnSpLocks/>
+          </p:cNvCxnSpPr>
+          <p:nvPr/>
+        </p:nvCxnSpPr>
+        <p:spPr>
+          <a:xfrm flipV="1">
+            <a:off x="1257994" y="1451556"/>
+            <a:ext cx="0" cy="207819"/>
+          </a:xfrm>
+          <a:prstGeom prst="straightConnector1">
+            <a:avLst/>
+          </a:prstGeom>
+          <a:ln>
+            <a:tailEnd type="triangle"/>
+          </a:ln>
+        </p:spPr>
+        <p:style>
+          <a:lnRef idx="1">
+            <a:schemeClr val="dk1"/>
+          </a:lnRef>
+          <a:fillRef idx="0">
+            <a:schemeClr val="dk1"/>
+          </a:fillRef>
+          <a:effectRef idx="0">
+            <a:schemeClr val="dk1"/>
+          </a:effectRef>
+          <a:fontRef idx="minor">
+            <a:schemeClr val="tx1"/>
+          </a:fontRef>
+        </p:style>
+      </p:cxnSp>
+      <p:sp>
+        <p:nvSpPr>
+          <p:cNvPr id="40" name="TextBox 39">
+            <a:extLst>
+              <a:ext uri="{FF2B5EF4-FFF2-40B4-BE49-F238E27FC236}">
+                <a16:creationId xmlns:a16="http://schemas.microsoft.com/office/drawing/2014/main" id="{A6B8EA74-FB2C-D8F6-8B59-DA3F88499EA6}"/>
+              </a:ext>
+            </a:extLst>
+          </p:cNvPr>
+          <p:cNvSpPr txBox="1"/>
+          <p:nvPr/>
+        </p:nvSpPr>
+        <p:spPr>
+          <a:xfrm>
+            <a:off x="425902" y="1605444"/>
+            <a:ext cx="1797287" cy="307777"/>
+          </a:xfrm>
+          <a:prstGeom prst="rect">
+            <a:avLst/>
+          </a:prstGeom>
+          <a:noFill/>
+        </p:spPr>
+        <p:txBody>
+          <a:bodyPr wrap="none" rtlCol="0">
+            <a:spAutoFit/>
+          </a:bodyPr>
+          <a:lstStyle/>
+          <a:p>
+            <a:r>
+              <a:rPr lang="en-US" altLang="zh-CN" dirty="0"/>
+              <a:t>First un-</a:t>
+            </a:r>
+            <a:r>
+              <a:rPr lang="en-US" altLang="zh-CN" dirty="0" err="1"/>
+              <a:t>ACKed</a:t>
+            </a:r>
+            <a:r>
+              <a:rPr lang="en-US" altLang="zh-CN" dirty="0"/>
+              <a:t> byte</a:t>
+            </a:r>
+            <a:endParaRPr lang="zh-CN" altLang="en-US" dirty="0"/>
+          </a:p>
+        </p:txBody>
+      </p:sp>
+    </p:spTree>
+    <p:extLst>
+      <p:ext uri="{BB962C8B-B14F-4D97-AF65-F5344CB8AC3E}">
+        <p14:creationId xmlns:p14="http://schemas.microsoft.com/office/powerpoint/2010/main" val="3562466915"/>
+      </p:ext>
+    </p:extLst>
   </p:cSld>
   <p:clrMapOvr>
     <a:masterClrMapping/>
